--- a/output/wordlabs-jump-3day.pptx
+++ b/output/wordlabs-jump-3day.pptx
@@ -4279,7 +4279,7 @@
                 <a:ea typeface="Calibri" pitchFamily="34" charset="-122"/>
                 <a:cs typeface="Calibri" pitchFamily="34" charset="-120"/>
               </a:rPr>
-              <a:t>Origin: Latin: jompare</a:t>
+              <a:t>Origin: Latin: iumpare</a:t>
             </a:r>
             <a:endParaRPr lang="en-US" sz="1300" dirty="0"/>
           </a:p>
@@ -5622,7 +5622,7 @@
                 <a:ea typeface="Trebuchet MS" pitchFamily="34" charset="-122"/>
                 <a:cs typeface="Trebuchet MS" pitchFamily="34" charset="-120"/>
               </a:rPr>
-              <a:t>1</a:t>
+              <a:t>0</a:t>
             </a:r>
             <a:pPr algn="ctr" indent="0" marL="0">
               <a:buNone/>
@@ -6071,7 +6071,7 @@
                 <a:ea typeface="Calibri" pitchFamily="34" charset="-122"/>
                 <a:cs typeface="Calibri" pitchFamily="34" charset="-120"/>
               </a:rPr>
-              <a:t> rabbit was </a:t>
+              <a:t> rabbit </a:t>
             </a:r>
             <a:pPr algn="l" indent="0" marL="0">
               <a:buNone/>
@@ -6088,7 +6088,7 @@
                 <a:ea typeface="Calibri" pitchFamily="34" charset="-122"/>
                 <a:cs typeface="Calibri" pitchFamily="34" charset="-120"/>
               </a:rPr>
-              <a:t>jumping</a:t>
+              <a:t>outjumped</a:t>
             </a:r>
             <a:pPr algn="l" indent="0" marL="0">
               <a:buNone/>
@@ -6102,7 +6102,7 @@
                 <a:ea typeface="Calibri" pitchFamily="34" charset="-122"/>
                 <a:cs typeface="Calibri" pitchFamily="34" charset="-120"/>
               </a:rPr>
-              <a:t> over every puddle in the paddock!</a:t>
+              <a:t> all the other animals in the field.</a:t>
             </a:r>
             <a:endParaRPr lang="en-US" sz="1800" dirty="0"/>
           </a:p>
@@ -6385,7 +6385,7 @@
                 <a:ea typeface="Trebuchet MS" pitchFamily="34" charset="-122"/>
                 <a:cs typeface="Trebuchet MS" pitchFamily="34" charset="-120"/>
               </a:rPr>
-              <a:t>jumping</a:t>
+              <a:t>outjumped</a:t>
             </a:r>
             <a:endParaRPr lang="en-US" sz="1400" dirty="0"/>
           </a:p>
@@ -11192,7 +11192,7 @@
                 <a:ea typeface="Trebuchet MS" pitchFamily="34" charset="-122"/>
                 <a:cs typeface="Trebuchet MS" pitchFamily="34" charset="-120"/>
               </a:rPr>
-              <a:t>jumping</a:t>
+              <a:t>outjumped</a:t>
             </a:r>
             <a:endParaRPr lang="en-US" sz="2800" dirty="0"/>
           </a:p>
@@ -12019,7 +12019,7 @@
                 <a:ea typeface="Trebuchet MS" pitchFamily="34" charset="-122"/>
                 <a:cs typeface="Trebuchet MS" pitchFamily="34" charset="-120"/>
               </a:rPr>
-              <a:t>jumping</a:t>
+              <a:t>outjumped</a:t>
             </a:r>
             <a:endParaRPr lang="en-US" sz="2800" dirty="0"/>
           </a:p>
@@ -12099,7 +12099,7 @@
         </p:nvSpPr>
         <p:spPr>
           <a:xfrm>
-            <a:off x="2938272" y="2258568"/>
+            <a:off x="2221992" y="2258568"/>
             <a:ext cx="1828800" cy="292608"/>
           </a:xfrm>
           <a:prstGeom prst="rect">
@@ -12108,11 +12108,11 @@
             </a:avLst>
           </a:prstGeom>
           <a:solidFill>
-            <a:srgbClr val="CCFBF1"/>
+            <a:srgbClr val="DDD6FE"/>
           </a:solidFill>
           <a:ln w="19050">
             <a:solidFill>
-              <a:srgbClr val="0D9488"/>
+              <a:srgbClr val="7C3AED"/>
             </a:solidFill>
             <a:prstDash val="solid"/>
           </a:ln>
@@ -12133,7 +12133,7 @@
         </p:nvSpPr>
         <p:spPr>
           <a:xfrm>
-            <a:off x="2938272" y="2258568"/>
+            <a:off x="2221992" y="2258568"/>
             <a:ext cx="1828800" cy="292608"/>
           </a:xfrm>
           <a:prstGeom prst="rect">
@@ -12152,13 +12152,13 @@
             <a:r>
               <a:rPr lang="en-US" sz="1300" b="1" dirty="0">
                 <a:solidFill>
-                  <a:srgbClr val="0F766E"/>
+                  <a:srgbClr val="4C1D95"/>
                 </a:solidFill>
                 <a:latin typeface="Trebuchet MS" pitchFamily="34" charset="0"/>
                 <a:ea typeface="Trebuchet MS" pitchFamily="34" charset="-122"/>
                 <a:cs typeface="Trebuchet MS" pitchFamily="34" charset="-120"/>
               </a:rPr>
-              <a:t>jump</a:t>
+              <a:t>out</a:t>
             </a:r>
             <a:endParaRPr lang="en-US" sz="1300" dirty="0"/>
           </a:p>
@@ -12172,7 +12172,7 @@
         </p:nvSpPr>
         <p:spPr>
           <a:xfrm>
-            <a:off x="2938272" y="2569464"/>
+            <a:off x="2221992" y="2569464"/>
             <a:ext cx="1828800" cy="201168"/>
           </a:xfrm>
           <a:prstGeom prst="rect">
@@ -12197,7 +12197,7 @@
                 <a:ea typeface="Calibri" pitchFamily="34" charset="-122"/>
                 <a:cs typeface="Calibri" pitchFamily="34" charset="-120"/>
               </a:rPr>
-              <a:t>to leap</a:t>
+              <a:t>beyond or more than</a:t>
             </a:r>
             <a:endParaRPr lang="en-US" sz="850" dirty="0"/>
           </a:p>
@@ -12211,7 +12211,7 @@
         </p:nvSpPr>
         <p:spPr>
           <a:xfrm>
-            <a:off x="5803392" y="2258568"/>
+            <a:off x="4370832" y="2258568"/>
             <a:ext cx="1828800" cy="292608"/>
           </a:xfrm>
           <a:prstGeom prst="rect">
@@ -12220,11 +12220,11 @@
             </a:avLst>
           </a:prstGeom>
           <a:solidFill>
-            <a:srgbClr val="FCE7F3"/>
+            <a:srgbClr val="CCFBF1"/>
           </a:solidFill>
           <a:ln w="19050">
             <a:solidFill>
-              <a:srgbClr val="DB2777"/>
+              <a:srgbClr val="0D9488"/>
             </a:solidFill>
             <a:prstDash val="solid"/>
           </a:ln>
@@ -12245,7 +12245,7 @@
         </p:nvSpPr>
         <p:spPr>
           <a:xfrm>
-            <a:off x="5803392" y="2258568"/>
+            <a:off x="4370832" y="2258568"/>
             <a:ext cx="1828800" cy="292608"/>
           </a:xfrm>
           <a:prstGeom prst="rect">
@@ -12264,13 +12264,13 @@
             <a:r>
               <a:rPr lang="en-US" sz="1300" b="1" dirty="0">
                 <a:solidFill>
-                  <a:srgbClr val="9D174D"/>
+                  <a:srgbClr val="0F766E"/>
                 </a:solidFill>
                 <a:latin typeface="Trebuchet MS" pitchFamily="34" charset="0"/>
                 <a:ea typeface="Trebuchet MS" pitchFamily="34" charset="-122"/>
                 <a:cs typeface="Trebuchet MS" pitchFamily="34" charset="-120"/>
               </a:rPr>
-              <a:t>ing</a:t>
+              <a:t>jump</a:t>
             </a:r>
             <a:endParaRPr lang="en-US" sz="1300" dirty="0"/>
           </a:p>
@@ -12284,7 +12284,7 @@
         </p:nvSpPr>
         <p:spPr>
           <a:xfrm>
-            <a:off x="5803392" y="2569464"/>
+            <a:off x="4370832" y="2569464"/>
             <a:ext cx="1828800" cy="201168"/>
           </a:xfrm>
           <a:prstGeom prst="rect">
@@ -12309,7 +12309,7 @@
                 <a:ea typeface="Calibri" pitchFamily="34" charset="-122"/>
                 <a:cs typeface="Calibri" pitchFamily="34" charset="-120"/>
               </a:rPr>
-              <a:t>action happening now</a:t>
+              <a:t>to leap</a:t>
             </a:r>
             <a:endParaRPr lang="en-US" sz="850" dirty="0"/>
           </a:p>
@@ -12318,6 +12318,118 @@
       <p:sp>
         <p:nvSpPr>
           <p:cNvPr id="22" name="Shape 20"/>
+          <p:cNvSpPr/>
+          <p:nvPr/>
+        </p:nvSpPr>
+        <p:spPr>
+          <a:xfrm>
+            <a:off x="6519672" y="2258568"/>
+            <a:ext cx="1828800" cy="292608"/>
+          </a:xfrm>
+          <a:prstGeom prst="rect">
+            <a:avLst>
+              <a:gd name="adj" fmla="val 25000"/>
+            </a:avLst>
+          </a:prstGeom>
+          <a:solidFill>
+            <a:srgbClr val="FCE7F3"/>
+          </a:solidFill>
+          <a:ln w="19050">
+            <a:solidFill>
+              <a:srgbClr val="DB2777"/>
+            </a:solidFill>
+            <a:prstDash val="solid"/>
+          </a:ln>
+          <a:effectLst>
+            <a:outerShdw sx="100000" sy="100000" kx="0" ky="0" algn="bl" rotWithShape="0" blurRad="101600" dist="38100" dir="8100000">
+              <a:srgbClr val="000000">
+                <a:alpha val="12000"/>
+              </a:srgbClr>
+            </a:outerShdw>
+          </a:effectLst>
+        </p:spPr>
+      </p:sp>
+      <p:sp>
+        <p:nvSpPr>
+          <p:cNvPr id="23" name="Text 21"/>
+          <p:cNvSpPr/>
+          <p:nvPr/>
+        </p:nvSpPr>
+        <p:spPr>
+          <a:xfrm>
+            <a:off x="6519672" y="2258568"/>
+            <a:ext cx="1828800" cy="292608"/>
+          </a:xfrm>
+          <a:prstGeom prst="rect">
+            <a:avLst/>
+          </a:prstGeom>
+          <a:noFill/>
+          <a:ln/>
+        </p:spPr>
+        <p:txBody>
+          <a:bodyPr wrap="square" lIns="0" tIns="0" rIns="0" bIns="0" rtlCol="0" anchor="ctr"/>
+          <a:lstStyle/>
+          <a:p>
+            <a:pPr algn="ctr" indent="0" marL="0">
+              <a:buNone/>
+            </a:pPr>
+            <a:r>
+              <a:rPr lang="en-US" sz="1300" b="1" dirty="0">
+                <a:solidFill>
+                  <a:srgbClr val="9D174D"/>
+                </a:solidFill>
+                <a:latin typeface="Trebuchet MS" pitchFamily="34" charset="0"/>
+                <a:ea typeface="Trebuchet MS" pitchFamily="34" charset="-122"/>
+                <a:cs typeface="Trebuchet MS" pitchFamily="34" charset="-120"/>
+              </a:rPr>
+              <a:t>ed</a:t>
+            </a:r>
+            <a:endParaRPr lang="en-US" sz="1300" dirty="0"/>
+          </a:p>
+        </p:txBody>
+      </p:sp>
+      <p:sp>
+        <p:nvSpPr>
+          <p:cNvPr id="24" name="Text 22"/>
+          <p:cNvSpPr/>
+          <p:nvPr/>
+        </p:nvSpPr>
+        <p:spPr>
+          <a:xfrm>
+            <a:off x="6519672" y="2569464"/>
+            <a:ext cx="1828800" cy="201168"/>
+          </a:xfrm>
+          <a:prstGeom prst="rect">
+            <a:avLst/>
+          </a:prstGeom>
+          <a:noFill/>
+          <a:ln/>
+        </p:spPr>
+        <p:txBody>
+          <a:bodyPr wrap="square" lIns="0" tIns="0" rIns="0" bIns="0" rtlCol="0" anchor="t"/>
+          <a:lstStyle/>
+          <a:p>
+            <a:pPr algn="ctr" indent="0" marL="0">
+              <a:buNone/>
+            </a:pPr>
+            <a:r>
+              <a:rPr lang="en-US" sz="850" dirty="0">
+                <a:solidFill>
+                  <a:srgbClr val="475569"/>
+                </a:solidFill>
+                <a:latin typeface="Calibri" pitchFamily="34" charset="0"/>
+                <a:ea typeface="Calibri" pitchFamily="34" charset="-122"/>
+                <a:cs typeface="Calibri" pitchFamily="34" charset="-120"/>
+              </a:rPr>
+              <a:t>past tense</a:t>
+            </a:r>
+            <a:endParaRPr lang="en-US" sz="850" dirty="0"/>
+          </a:p>
+        </p:txBody>
+      </p:sp>
+      <p:sp>
+        <p:nvSpPr>
+          <p:cNvPr id="25" name="Shape 23"/>
           <p:cNvSpPr/>
           <p:nvPr/>
         </p:nvSpPr>
@@ -12344,7 +12456,7 @@
       </p:sp>
       <p:sp>
         <p:nvSpPr>
-          <p:cNvPr id="23" name="Text 21"/>
+          <p:cNvPr id="26" name="Text 24"/>
           <p:cNvSpPr/>
           <p:nvPr/>
         </p:nvSpPr>
@@ -12383,7 +12495,7 @@
       </p:sp>
       <p:sp>
         <p:nvSpPr>
-          <p:cNvPr id="24" name="Shape 22"/>
+          <p:cNvPr id="27" name="Shape 25"/>
           <p:cNvSpPr/>
           <p:nvPr/>
         </p:nvSpPr>
@@ -12410,7 +12522,7 @@
       </p:sp>
       <p:sp>
         <p:nvSpPr>
-          <p:cNvPr id="25" name="Text 23"/>
+          <p:cNvPr id="28" name="Text 26"/>
           <p:cNvSpPr/>
           <p:nvPr/>
         </p:nvSpPr>
@@ -12449,7 +12561,7 @@
       </p:sp>
       <p:sp>
         <p:nvSpPr>
-          <p:cNvPr id="26" name="Shape 24"/>
+          <p:cNvPr id="29" name="Shape 27"/>
           <p:cNvSpPr/>
           <p:nvPr/>
         </p:nvSpPr>
@@ -12476,7 +12588,7 @@
       </p:sp>
       <p:sp>
         <p:nvSpPr>
-          <p:cNvPr id="27" name="Text 25"/>
+          <p:cNvPr id="30" name="Text 28"/>
           <p:cNvSpPr/>
           <p:nvPr/>
         </p:nvSpPr>
@@ -12515,7 +12627,7 @@
       </p:sp>
       <p:sp>
         <p:nvSpPr>
-          <p:cNvPr id="28" name="Shape 26"/>
+          <p:cNvPr id="31" name="Shape 29"/>
           <p:cNvSpPr/>
           <p:nvPr/>
         </p:nvSpPr>
@@ -12542,7 +12654,7 @@
       </p:sp>
       <p:sp>
         <p:nvSpPr>
-          <p:cNvPr id="29" name="Text 27"/>
+          <p:cNvPr id="32" name="Text 30"/>
           <p:cNvSpPr/>
           <p:nvPr/>
         </p:nvSpPr>
@@ -13004,7 +13116,7 @@
                 <a:ea typeface="Trebuchet MS" pitchFamily="34" charset="-122"/>
                 <a:cs typeface="Trebuchet MS" pitchFamily="34" charset="-120"/>
               </a:rPr>
-              <a:t>jumping</a:t>
+              <a:t>outjumped</a:t>
             </a:r>
             <a:endParaRPr lang="en-US" sz="2800" dirty="0"/>
           </a:p>
@@ -13084,7 +13196,7 @@
         </p:nvSpPr>
         <p:spPr>
           <a:xfrm>
-            <a:off x="2938272" y="2258568"/>
+            <a:off x="2221992" y="2258568"/>
             <a:ext cx="1828800" cy="292608"/>
           </a:xfrm>
           <a:prstGeom prst="rect">
@@ -13093,11 +13205,11 @@
             </a:avLst>
           </a:prstGeom>
           <a:solidFill>
-            <a:srgbClr val="CCFBF1"/>
+            <a:srgbClr val="DDD6FE"/>
           </a:solidFill>
           <a:ln w="19050">
             <a:solidFill>
-              <a:srgbClr val="0D9488"/>
+              <a:srgbClr val="7C3AED"/>
             </a:solidFill>
             <a:prstDash val="solid"/>
           </a:ln>
@@ -13118,7 +13230,7 @@
         </p:nvSpPr>
         <p:spPr>
           <a:xfrm>
-            <a:off x="2938272" y="2258568"/>
+            <a:off x="2221992" y="2258568"/>
             <a:ext cx="1828800" cy="292608"/>
           </a:xfrm>
           <a:prstGeom prst="rect">
@@ -13137,13 +13249,13 @@
             <a:r>
               <a:rPr lang="en-US" sz="1300" b="1" dirty="0">
                 <a:solidFill>
-                  <a:srgbClr val="0F766E"/>
+                  <a:srgbClr val="4C1D95"/>
                 </a:solidFill>
                 <a:latin typeface="Trebuchet MS" pitchFamily="34" charset="0"/>
                 <a:ea typeface="Trebuchet MS" pitchFamily="34" charset="-122"/>
                 <a:cs typeface="Trebuchet MS" pitchFamily="34" charset="-120"/>
               </a:rPr>
-              <a:t>jump</a:t>
+              <a:t>out</a:t>
             </a:r>
             <a:endParaRPr lang="en-US" sz="1300" dirty="0"/>
           </a:p>
@@ -13157,7 +13269,7 @@
         </p:nvSpPr>
         <p:spPr>
           <a:xfrm>
-            <a:off x="2938272" y="2569464"/>
+            <a:off x="2221992" y="2569464"/>
             <a:ext cx="1828800" cy="201168"/>
           </a:xfrm>
           <a:prstGeom prst="rect">
@@ -13182,7 +13294,7 @@
                 <a:ea typeface="Calibri" pitchFamily="34" charset="-122"/>
                 <a:cs typeface="Calibri" pitchFamily="34" charset="-120"/>
               </a:rPr>
-              <a:t>to leap</a:t>
+              <a:t>beyond or more than</a:t>
             </a:r>
             <a:endParaRPr lang="en-US" sz="850" dirty="0"/>
           </a:p>
@@ -13196,7 +13308,7 @@
         </p:nvSpPr>
         <p:spPr>
           <a:xfrm>
-            <a:off x="5803392" y="2258568"/>
+            <a:off x="4370832" y="2258568"/>
             <a:ext cx="1828800" cy="292608"/>
           </a:xfrm>
           <a:prstGeom prst="rect">
@@ -13205,11 +13317,11 @@
             </a:avLst>
           </a:prstGeom>
           <a:solidFill>
-            <a:srgbClr val="FCE7F3"/>
+            <a:srgbClr val="CCFBF1"/>
           </a:solidFill>
           <a:ln w="19050">
             <a:solidFill>
-              <a:srgbClr val="DB2777"/>
+              <a:srgbClr val="0D9488"/>
             </a:solidFill>
             <a:prstDash val="solid"/>
           </a:ln>
@@ -13230,7 +13342,7 @@
         </p:nvSpPr>
         <p:spPr>
           <a:xfrm>
-            <a:off x="5803392" y="2258568"/>
+            <a:off x="4370832" y="2258568"/>
             <a:ext cx="1828800" cy="292608"/>
           </a:xfrm>
           <a:prstGeom prst="rect">
@@ -13249,13 +13361,13 @@
             <a:r>
               <a:rPr lang="en-US" sz="1300" b="1" dirty="0">
                 <a:solidFill>
-                  <a:srgbClr val="9D174D"/>
+                  <a:srgbClr val="0F766E"/>
                 </a:solidFill>
                 <a:latin typeface="Trebuchet MS" pitchFamily="34" charset="0"/>
                 <a:ea typeface="Trebuchet MS" pitchFamily="34" charset="-122"/>
                 <a:cs typeface="Trebuchet MS" pitchFamily="34" charset="-120"/>
               </a:rPr>
-              <a:t>ing</a:t>
+              <a:t>jump</a:t>
             </a:r>
             <a:endParaRPr lang="en-US" sz="1300" dirty="0"/>
           </a:p>
@@ -13269,7 +13381,7 @@
         </p:nvSpPr>
         <p:spPr>
           <a:xfrm>
-            <a:off x="5803392" y="2569464"/>
+            <a:off x="4370832" y="2569464"/>
             <a:ext cx="1828800" cy="201168"/>
           </a:xfrm>
           <a:prstGeom prst="rect">
@@ -13294,7 +13406,7 @@
                 <a:ea typeface="Calibri" pitchFamily="34" charset="-122"/>
                 <a:cs typeface="Calibri" pitchFamily="34" charset="-120"/>
               </a:rPr>
-              <a:t>action happening now</a:t>
+              <a:t>to leap</a:t>
             </a:r>
             <a:endParaRPr lang="en-US" sz="850" dirty="0"/>
           </a:p>
@@ -13303,6 +13415,118 @@
       <p:sp>
         <p:nvSpPr>
           <p:cNvPr id="22" name="Shape 20"/>
+          <p:cNvSpPr/>
+          <p:nvPr/>
+        </p:nvSpPr>
+        <p:spPr>
+          <a:xfrm>
+            <a:off x="6519672" y="2258568"/>
+            <a:ext cx="1828800" cy="292608"/>
+          </a:xfrm>
+          <a:prstGeom prst="rect">
+            <a:avLst>
+              <a:gd name="adj" fmla="val 25000"/>
+            </a:avLst>
+          </a:prstGeom>
+          <a:solidFill>
+            <a:srgbClr val="FCE7F3"/>
+          </a:solidFill>
+          <a:ln w="19050">
+            <a:solidFill>
+              <a:srgbClr val="DB2777"/>
+            </a:solidFill>
+            <a:prstDash val="solid"/>
+          </a:ln>
+          <a:effectLst>
+            <a:outerShdw sx="100000" sy="100000" kx="0" ky="0" algn="bl" rotWithShape="0" blurRad="101600" dist="38100" dir="8100000">
+              <a:srgbClr val="000000">
+                <a:alpha val="12000"/>
+              </a:srgbClr>
+            </a:outerShdw>
+          </a:effectLst>
+        </p:spPr>
+      </p:sp>
+      <p:sp>
+        <p:nvSpPr>
+          <p:cNvPr id="23" name="Text 21"/>
+          <p:cNvSpPr/>
+          <p:nvPr/>
+        </p:nvSpPr>
+        <p:spPr>
+          <a:xfrm>
+            <a:off x="6519672" y="2258568"/>
+            <a:ext cx="1828800" cy="292608"/>
+          </a:xfrm>
+          <a:prstGeom prst="rect">
+            <a:avLst/>
+          </a:prstGeom>
+          <a:noFill/>
+          <a:ln/>
+        </p:spPr>
+        <p:txBody>
+          <a:bodyPr wrap="square" lIns="0" tIns="0" rIns="0" bIns="0" rtlCol="0" anchor="ctr"/>
+          <a:lstStyle/>
+          <a:p>
+            <a:pPr algn="ctr" indent="0" marL="0">
+              <a:buNone/>
+            </a:pPr>
+            <a:r>
+              <a:rPr lang="en-US" sz="1300" b="1" dirty="0">
+                <a:solidFill>
+                  <a:srgbClr val="9D174D"/>
+                </a:solidFill>
+                <a:latin typeface="Trebuchet MS" pitchFamily="34" charset="0"/>
+                <a:ea typeface="Trebuchet MS" pitchFamily="34" charset="-122"/>
+                <a:cs typeface="Trebuchet MS" pitchFamily="34" charset="-120"/>
+              </a:rPr>
+              <a:t>ed</a:t>
+            </a:r>
+            <a:endParaRPr lang="en-US" sz="1300" dirty="0"/>
+          </a:p>
+        </p:txBody>
+      </p:sp>
+      <p:sp>
+        <p:nvSpPr>
+          <p:cNvPr id="24" name="Text 22"/>
+          <p:cNvSpPr/>
+          <p:nvPr/>
+        </p:nvSpPr>
+        <p:spPr>
+          <a:xfrm>
+            <a:off x="6519672" y="2569464"/>
+            <a:ext cx="1828800" cy="201168"/>
+          </a:xfrm>
+          <a:prstGeom prst="rect">
+            <a:avLst/>
+          </a:prstGeom>
+          <a:noFill/>
+          <a:ln/>
+        </p:spPr>
+        <p:txBody>
+          <a:bodyPr wrap="square" lIns="0" tIns="0" rIns="0" bIns="0" rtlCol="0" anchor="t"/>
+          <a:lstStyle/>
+          <a:p>
+            <a:pPr algn="ctr" indent="0" marL="0">
+              <a:buNone/>
+            </a:pPr>
+            <a:r>
+              <a:rPr lang="en-US" sz="850" dirty="0">
+                <a:solidFill>
+                  <a:srgbClr val="475569"/>
+                </a:solidFill>
+                <a:latin typeface="Calibri" pitchFamily="34" charset="0"/>
+                <a:ea typeface="Calibri" pitchFamily="34" charset="-122"/>
+                <a:cs typeface="Calibri" pitchFamily="34" charset="-120"/>
+              </a:rPr>
+              <a:t>past tense</a:t>
+            </a:r>
+            <a:endParaRPr lang="en-US" sz="850" dirty="0"/>
+          </a:p>
+        </p:txBody>
+      </p:sp>
+      <p:sp>
+        <p:nvSpPr>
+          <p:cNvPr id="25" name="Shape 23"/>
           <p:cNvSpPr/>
           <p:nvPr/>
         </p:nvSpPr>
@@ -13329,7 +13553,7 @@
       </p:sp>
       <p:sp>
         <p:nvSpPr>
-          <p:cNvPr id="23" name="Text 21"/>
+          <p:cNvPr id="26" name="Text 24"/>
           <p:cNvSpPr/>
           <p:nvPr/>
         </p:nvSpPr>
@@ -13368,7 +13592,7 @@
       </p:sp>
       <p:sp>
         <p:nvSpPr>
-          <p:cNvPr id="24" name="Shape 22"/>
+          <p:cNvPr id="27" name="Shape 25"/>
           <p:cNvSpPr/>
           <p:nvPr/>
         </p:nvSpPr>
@@ -13395,7 +13619,7 @@
       </p:sp>
       <p:sp>
         <p:nvSpPr>
-          <p:cNvPr id="25" name="Shape 23"/>
+          <p:cNvPr id="28" name="Shape 26"/>
           <p:cNvSpPr/>
           <p:nvPr/>
         </p:nvSpPr>
@@ -13422,7 +13646,7 @@
       </p:sp>
       <p:sp>
         <p:nvSpPr>
-          <p:cNvPr id="26" name="Text 24"/>
+          <p:cNvPr id="29" name="Text 27"/>
           <p:cNvSpPr/>
           <p:nvPr/>
         </p:nvSpPr>
@@ -13453,7 +13677,7 @@
                 <a:ea typeface="Trebuchet MS" pitchFamily="34" charset="-122"/>
                 <a:cs typeface="Trebuchet MS" pitchFamily="34" charset="-120"/>
               </a:rPr>
-              <a:t>jump</a:t>
+              <a:t>out</a:t>
             </a:r>
             <a:endParaRPr lang="en-US" sz="1400" dirty="0"/>
           </a:p>
@@ -13461,7 +13685,7 @@
       </p:sp>
       <p:sp>
         <p:nvSpPr>
-          <p:cNvPr id="27" name="Text 25"/>
+          <p:cNvPr id="30" name="Text 28"/>
           <p:cNvSpPr/>
           <p:nvPr/>
         </p:nvSpPr>
@@ -13500,7 +13724,7 @@
       </p:sp>
       <p:sp>
         <p:nvSpPr>
-          <p:cNvPr id="28" name="Shape 26"/>
+          <p:cNvPr id="31" name="Shape 29"/>
           <p:cNvSpPr/>
           <p:nvPr/>
         </p:nvSpPr>
@@ -13527,7 +13751,7 @@
       </p:sp>
       <p:sp>
         <p:nvSpPr>
-          <p:cNvPr id="29" name="Text 27"/>
+          <p:cNvPr id="32" name="Text 30"/>
           <p:cNvSpPr/>
           <p:nvPr/>
         </p:nvSpPr>
@@ -13558,7 +13782,7 @@
                 <a:ea typeface="Trebuchet MS" pitchFamily="34" charset="-122"/>
                 <a:cs typeface="Trebuchet MS" pitchFamily="34" charset="-120"/>
               </a:rPr>
-              <a:t>ing</a:t>
+              <a:t>jumped</a:t>
             </a:r>
             <a:endParaRPr lang="en-US" sz="1400" dirty="0"/>
           </a:p>
@@ -13566,7 +13790,7 @@
       </p:sp>
       <p:sp>
         <p:nvSpPr>
-          <p:cNvPr id="30" name="Shape 28"/>
+          <p:cNvPr id="33" name="Shape 31"/>
           <p:cNvSpPr/>
           <p:nvPr/>
         </p:nvSpPr>
@@ -13593,7 +13817,7 @@
       </p:sp>
       <p:sp>
         <p:nvSpPr>
-          <p:cNvPr id="31" name="Text 29"/>
+          <p:cNvPr id="34" name="Text 32"/>
           <p:cNvSpPr/>
           <p:nvPr/>
         </p:nvSpPr>
@@ -13632,7 +13856,7 @@
       </p:sp>
       <p:sp>
         <p:nvSpPr>
-          <p:cNvPr id="32" name="Shape 30"/>
+          <p:cNvPr id="35" name="Shape 33"/>
           <p:cNvSpPr/>
           <p:nvPr/>
         </p:nvSpPr>
@@ -13659,7 +13883,7 @@
       </p:sp>
       <p:sp>
         <p:nvSpPr>
-          <p:cNvPr id="33" name="Text 31"/>
+          <p:cNvPr id="36" name="Text 34"/>
           <p:cNvSpPr/>
           <p:nvPr/>
         </p:nvSpPr>
@@ -14386,7 +14610,7 @@
                 <a:ea typeface="Trebuchet MS" pitchFamily="34" charset="-122"/>
                 <a:cs typeface="Trebuchet MS" pitchFamily="34" charset="-120"/>
               </a:rPr>
-              <a:t>jumping</a:t>
+              <a:t>outjumped</a:t>
             </a:r>
             <a:endParaRPr lang="en-US" sz="2800" dirty="0"/>
           </a:p>
@@ -14466,7 +14690,7 @@
         </p:nvSpPr>
         <p:spPr>
           <a:xfrm>
-            <a:off x="2938272" y="2258568"/>
+            <a:off x="2221992" y="2258568"/>
             <a:ext cx="1828800" cy="292608"/>
           </a:xfrm>
           <a:prstGeom prst="rect">
@@ -14475,11 +14699,11 @@
             </a:avLst>
           </a:prstGeom>
           <a:solidFill>
-            <a:srgbClr val="CCFBF1"/>
+            <a:srgbClr val="DDD6FE"/>
           </a:solidFill>
           <a:ln w="19050">
             <a:solidFill>
-              <a:srgbClr val="0D9488"/>
+              <a:srgbClr val="7C3AED"/>
             </a:solidFill>
             <a:prstDash val="solid"/>
           </a:ln>
@@ -14500,7 +14724,7 @@
         </p:nvSpPr>
         <p:spPr>
           <a:xfrm>
-            <a:off x="2938272" y="2258568"/>
+            <a:off x="2221992" y="2258568"/>
             <a:ext cx="1828800" cy="292608"/>
           </a:xfrm>
           <a:prstGeom prst="rect">
@@ -14519,13 +14743,13 @@
             <a:r>
               <a:rPr lang="en-US" sz="1300" b="1" dirty="0">
                 <a:solidFill>
-                  <a:srgbClr val="0F766E"/>
+                  <a:srgbClr val="4C1D95"/>
                 </a:solidFill>
                 <a:latin typeface="Trebuchet MS" pitchFamily="34" charset="0"/>
                 <a:ea typeface="Trebuchet MS" pitchFamily="34" charset="-122"/>
                 <a:cs typeface="Trebuchet MS" pitchFamily="34" charset="-120"/>
               </a:rPr>
-              <a:t>jump</a:t>
+              <a:t>out</a:t>
             </a:r>
             <a:endParaRPr lang="en-US" sz="1300" dirty="0"/>
           </a:p>
@@ -14539,7 +14763,7 @@
         </p:nvSpPr>
         <p:spPr>
           <a:xfrm>
-            <a:off x="2938272" y="2569464"/>
+            <a:off x="2221992" y="2569464"/>
             <a:ext cx="1828800" cy="201168"/>
           </a:xfrm>
           <a:prstGeom prst="rect">
@@ -14564,7 +14788,7 @@
                 <a:ea typeface="Calibri" pitchFamily="34" charset="-122"/>
                 <a:cs typeface="Calibri" pitchFamily="34" charset="-120"/>
               </a:rPr>
-              <a:t>to leap</a:t>
+              <a:t>beyond or more than</a:t>
             </a:r>
             <a:endParaRPr lang="en-US" sz="850" dirty="0"/>
           </a:p>
@@ -14578,7 +14802,7 @@
         </p:nvSpPr>
         <p:spPr>
           <a:xfrm>
-            <a:off x="5803392" y="2258568"/>
+            <a:off x="4370832" y="2258568"/>
             <a:ext cx="1828800" cy="292608"/>
           </a:xfrm>
           <a:prstGeom prst="rect">
@@ -14587,11 +14811,11 @@
             </a:avLst>
           </a:prstGeom>
           <a:solidFill>
-            <a:srgbClr val="FCE7F3"/>
+            <a:srgbClr val="CCFBF1"/>
           </a:solidFill>
           <a:ln w="19050">
             <a:solidFill>
-              <a:srgbClr val="DB2777"/>
+              <a:srgbClr val="0D9488"/>
             </a:solidFill>
             <a:prstDash val="solid"/>
           </a:ln>
@@ -14612,7 +14836,7 @@
         </p:nvSpPr>
         <p:spPr>
           <a:xfrm>
-            <a:off x="5803392" y="2258568"/>
+            <a:off x="4370832" y="2258568"/>
             <a:ext cx="1828800" cy="292608"/>
           </a:xfrm>
           <a:prstGeom prst="rect">
@@ -14631,13 +14855,13 @@
             <a:r>
               <a:rPr lang="en-US" sz="1300" b="1" dirty="0">
                 <a:solidFill>
-                  <a:srgbClr val="9D174D"/>
+                  <a:srgbClr val="0F766E"/>
                 </a:solidFill>
                 <a:latin typeface="Trebuchet MS" pitchFamily="34" charset="0"/>
                 <a:ea typeface="Trebuchet MS" pitchFamily="34" charset="-122"/>
                 <a:cs typeface="Trebuchet MS" pitchFamily="34" charset="-120"/>
               </a:rPr>
-              <a:t>ing</a:t>
+              <a:t>jump</a:t>
             </a:r>
             <a:endParaRPr lang="en-US" sz="1300" dirty="0"/>
           </a:p>
@@ -14651,7 +14875,7 @@
         </p:nvSpPr>
         <p:spPr>
           <a:xfrm>
-            <a:off x="5803392" y="2569464"/>
+            <a:off x="4370832" y="2569464"/>
             <a:ext cx="1828800" cy="201168"/>
           </a:xfrm>
           <a:prstGeom prst="rect">
@@ -14676,7 +14900,7 @@
                 <a:ea typeface="Calibri" pitchFamily="34" charset="-122"/>
                 <a:cs typeface="Calibri" pitchFamily="34" charset="-120"/>
               </a:rPr>
-              <a:t>action happening now</a:t>
+              <a:t>to leap</a:t>
             </a:r>
             <a:endParaRPr lang="en-US" sz="850" dirty="0"/>
           </a:p>
@@ -14685,6 +14909,118 @@
       <p:sp>
         <p:nvSpPr>
           <p:cNvPr id="22" name="Shape 20"/>
+          <p:cNvSpPr/>
+          <p:nvPr/>
+        </p:nvSpPr>
+        <p:spPr>
+          <a:xfrm>
+            <a:off x="6519672" y="2258568"/>
+            <a:ext cx="1828800" cy="292608"/>
+          </a:xfrm>
+          <a:prstGeom prst="rect">
+            <a:avLst>
+              <a:gd name="adj" fmla="val 25000"/>
+            </a:avLst>
+          </a:prstGeom>
+          <a:solidFill>
+            <a:srgbClr val="FCE7F3"/>
+          </a:solidFill>
+          <a:ln w="19050">
+            <a:solidFill>
+              <a:srgbClr val="DB2777"/>
+            </a:solidFill>
+            <a:prstDash val="solid"/>
+          </a:ln>
+          <a:effectLst>
+            <a:outerShdw sx="100000" sy="100000" kx="0" ky="0" algn="bl" rotWithShape="0" blurRad="101600" dist="38100" dir="8100000">
+              <a:srgbClr val="000000">
+                <a:alpha val="12000"/>
+              </a:srgbClr>
+            </a:outerShdw>
+          </a:effectLst>
+        </p:spPr>
+      </p:sp>
+      <p:sp>
+        <p:nvSpPr>
+          <p:cNvPr id="23" name="Text 21"/>
+          <p:cNvSpPr/>
+          <p:nvPr/>
+        </p:nvSpPr>
+        <p:spPr>
+          <a:xfrm>
+            <a:off x="6519672" y="2258568"/>
+            <a:ext cx="1828800" cy="292608"/>
+          </a:xfrm>
+          <a:prstGeom prst="rect">
+            <a:avLst/>
+          </a:prstGeom>
+          <a:noFill/>
+          <a:ln/>
+        </p:spPr>
+        <p:txBody>
+          <a:bodyPr wrap="square" lIns="0" tIns="0" rIns="0" bIns="0" rtlCol="0" anchor="ctr"/>
+          <a:lstStyle/>
+          <a:p>
+            <a:pPr algn="ctr" indent="0" marL="0">
+              <a:buNone/>
+            </a:pPr>
+            <a:r>
+              <a:rPr lang="en-US" sz="1300" b="1" dirty="0">
+                <a:solidFill>
+                  <a:srgbClr val="9D174D"/>
+                </a:solidFill>
+                <a:latin typeface="Trebuchet MS" pitchFamily="34" charset="0"/>
+                <a:ea typeface="Trebuchet MS" pitchFamily="34" charset="-122"/>
+                <a:cs typeface="Trebuchet MS" pitchFamily="34" charset="-120"/>
+              </a:rPr>
+              <a:t>ed</a:t>
+            </a:r>
+            <a:endParaRPr lang="en-US" sz="1300" dirty="0"/>
+          </a:p>
+        </p:txBody>
+      </p:sp>
+      <p:sp>
+        <p:nvSpPr>
+          <p:cNvPr id="24" name="Text 22"/>
+          <p:cNvSpPr/>
+          <p:nvPr/>
+        </p:nvSpPr>
+        <p:spPr>
+          <a:xfrm>
+            <a:off x="6519672" y="2569464"/>
+            <a:ext cx="1828800" cy="201168"/>
+          </a:xfrm>
+          <a:prstGeom prst="rect">
+            <a:avLst/>
+          </a:prstGeom>
+          <a:noFill/>
+          <a:ln/>
+        </p:spPr>
+        <p:txBody>
+          <a:bodyPr wrap="square" lIns="0" tIns="0" rIns="0" bIns="0" rtlCol="0" anchor="t"/>
+          <a:lstStyle/>
+          <a:p>
+            <a:pPr algn="ctr" indent="0" marL="0">
+              <a:buNone/>
+            </a:pPr>
+            <a:r>
+              <a:rPr lang="en-US" sz="850" dirty="0">
+                <a:solidFill>
+                  <a:srgbClr val="475569"/>
+                </a:solidFill>
+                <a:latin typeface="Calibri" pitchFamily="34" charset="0"/>
+                <a:ea typeface="Calibri" pitchFamily="34" charset="-122"/>
+                <a:cs typeface="Calibri" pitchFamily="34" charset="-120"/>
+              </a:rPr>
+              <a:t>past tense</a:t>
+            </a:r>
+            <a:endParaRPr lang="en-US" sz="850" dirty="0"/>
+          </a:p>
+        </p:txBody>
+      </p:sp>
+      <p:sp>
+        <p:nvSpPr>
+          <p:cNvPr id="25" name="Shape 23"/>
           <p:cNvSpPr/>
           <p:nvPr/>
         </p:nvSpPr>
@@ -14711,7 +15047,7 @@
       </p:sp>
       <p:sp>
         <p:nvSpPr>
-          <p:cNvPr id="23" name="Text 21"/>
+          <p:cNvPr id="26" name="Text 24"/>
           <p:cNvSpPr/>
           <p:nvPr/>
         </p:nvSpPr>
@@ -14750,7 +15086,7 @@
       </p:sp>
       <p:sp>
         <p:nvSpPr>
-          <p:cNvPr id="24" name="Shape 22"/>
+          <p:cNvPr id="27" name="Shape 25"/>
           <p:cNvSpPr/>
           <p:nvPr/>
         </p:nvSpPr>
@@ -14777,7 +15113,7 @@
       </p:sp>
       <p:sp>
         <p:nvSpPr>
-          <p:cNvPr id="25" name="Shape 23"/>
+          <p:cNvPr id="28" name="Shape 26"/>
           <p:cNvSpPr/>
           <p:nvPr/>
         </p:nvSpPr>
@@ -14804,7 +15140,7 @@
       </p:sp>
       <p:sp>
         <p:nvSpPr>
-          <p:cNvPr id="26" name="Text 24"/>
+          <p:cNvPr id="29" name="Text 27"/>
           <p:cNvSpPr/>
           <p:nvPr/>
         </p:nvSpPr>
@@ -14835,7 +15171,7 @@
                 <a:ea typeface="Trebuchet MS" pitchFamily="34" charset="-122"/>
                 <a:cs typeface="Trebuchet MS" pitchFamily="34" charset="-120"/>
               </a:rPr>
-              <a:t>jump</a:t>
+              <a:t>out</a:t>
             </a:r>
             <a:endParaRPr lang="en-US" sz="1400" dirty="0"/>
           </a:p>
@@ -14843,7 +15179,7 @@
       </p:sp>
       <p:sp>
         <p:nvSpPr>
-          <p:cNvPr id="27" name="Text 25"/>
+          <p:cNvPr id="30" name="Text 28"/>
           <p:cNvSpPr/>
           <p:nvPr/>
         </p:nvSpPr>
@@ -14882,7 +15218,7 @@
       </p:sp>
       <p:sp>
         <p:nvSpPr>
-          <p:cNvPr id="28" name="Shape 26"/>
+          <p:cNvPr id="31" name="Shape 29"/>
           <p:cNvSpPr/>
           <p:nvPr/>
         </p:nvSpPr>
@@ -14909,7 +15245,7 @@
       </p:sp>
       <p:sp>
         <p:nvSpPr>
-          <p:cNvPr id="29" name="Text 27"/>
+          <p:cNvPr id="32" name="Text 30"/>
           <p:cNvSpPr/>
           <p:nvPr/>
         </p:nvSpPr>
@@ -14940,7 +15276,7 @@
                 <a:ea typeface="Trebuchet MS" pitchFamily="34" charset="-122"/>
                 <a:cs typeface="Trebuchet MS" pitchFamily="34" charset="-120"/>
               </a:rPr>
-              <a:t>ing</a:t>
+              <a:t>jumped</a:t>
             </a:r>
             <a:endParaRPr lang="en-US" sz="1400" dirty="0"/>
           </a:p>
@@ -14948,7 +15284,7 @@
       </p:sp>
       <p:sp>
         <p:nvSpPr>
-          <p:cNvPr id="30" name="Shape 28"/>
+          <p:cNvPr id="33" name="Shape 31"/>
           <p:cNvSpPr/>
           <p:nvPr/>
         </p:nvSpPr>
@@ -14975,7 +15311,7 @@
       </p:sp>
       <p:sp>
         <p:nvSpPr>
-          <p:cNvPr id="31" name="Text 29"/>
+          <p:cNvPr id="34" name="Text 32"/>
           <p:cNvSpPr/>
           <p:nvPr/>
         </p:nvSpPr>
@@ -15014,7 +15350,7 @@
       </p:sp>
       <p:sp>
         <p:nvSpPr>
-          <p:cNvPr id="32" name="Shape 30"/>
+          <p:cNvPr id="35" name="Shape 33"/>
           <p:cNvSpPr/>
           <p:nvPr/>
         </p:nvSpPr>
@@ -15041,13 +15377,13 @@
       </p:sp>
       <p:sp>
         <p:nvSpPr>
-          <p:cNvPr id="33" name="Shape 31"/>
-          <p:cNvSpPr/>
-          <p:nvPr/>
-        </p:nvSpPr>
-        <p:spPr>
-          <a:xfrm>
-            <a:off x="2427732" y="4169664"/>
+          <p:cNvPr id="36" name="Shape 34"/>
+          <p:cNvSpPr/>
+          <p:nvPr/>
+        </p:nvSpPr>
+        <p:spPr>
+          <a:xfrm>
+            <a:off x="2124837" y="4169664"/>
             <a:ext cx="685800" cy="475488"/>
           </a:xfrm>
           <a:prstGeom prst="rect">
@@ -15068,13 +15404,13 @@
       </p:sp>
       <p:sp>
         <p:nvSpPr>
-          <p:cNvPr id="34" name="Text 32"/>
-          <p:cNvSpPr/>
-          <p:nvPr/>
-        </p:nvSpPr>
-        <p:spPr>
-          <a:xfrm>
-            <a:off x="2427732" y="4169664"/>
+          <p:cNvPr id="37" name="Text 35"/>
+          <p:cNvSpPr/>
+          <p:nvPr/>
+        </p:nvSpPr>
+        <p:spPr>
+          <a:xfrm>
+            <a:off x="2124837" y="4169664"/>
             <a:ext cx="685800" cy="475488"/>
           </a:xfrm>
           <a:prstGeom prst="rect">
@@ -15099,7 +15435,7 @@
                 <a:ea typeface="Trebuchet MS" pitchFamily="34" charset="-122"/>
                 <a:cs typeface="Trebuchet MS" pitchFamily="34" charset="-120"/>
               </a:rPr>
-              <a:t>j</a:t>
+              <a:t>ou</a:t>
             </a:r>
             <a:endParaRPr lang="en-US" sz="900" dirty="0"/>
           </a:p>
@@ -15107,13 +15443,13 @@
       </p:sp>
       <p:sp>
         <p:nvSpPr>
-          <p:cNvPr id="35" name="Shape 33"/>
-          <p:cNvSpPr/>
-          <p:nvPr/>
-        </p:nvSpPr>
-        <p:spPr>
-          <a:xfrm>
-            <a:off x="3639312" y="4169664"/>
+          <p:cNvPr id="38" name="Shape 36"/>
+          <p:cNvSpPr/>
+          <p:nvPr/>
+        </p:nvSpPr>
+        <p:spPr>
+          <a:xfrm>
+            <a:off x="3033522" y="4169664"/>
             <a:ext cx="685800" cy="475488"/>
           </a:xfrm>
           <a:prstGeom prst="rect">
@@ -15134,13 +15470,13 @@
       </p:sp>
       <p:sp>
         <p:nvSpPr>
-          <p:cNvPr id="36" name="Text 34"/>
-          <p:cNvSpPr/>
-          <p:nvPr/>
-        </p:nvSpPr>
-        <p:spPr>
-          <a:xfrm>
-            <a:off x="3639312" y="4169664"/>
+          <p:cNvPr id="39" name="Text 37"/>
+          <p:cNvSpPr/>
+          <p:nvPr/>
+        </p:nvSpPr>
+        <p:spPr>
+          <a:xfrm>
+            <a:off x="3033522" y="4169664"/>
             <a:ext cx="685800" cy="475488"/>
           </a:xfrm>
           <a:prstGeom prst="rect">
@@ -15165,7 +15501,7 @@
                 <a:ea typeface="Trebuchet MS" pitchFamily="34" charset="-122"/>
                 <a:cs typeface="Trebuchet MS" pitchFamily="34" charset="-120"/>
               </a:rPr>
-              <a:t>u</a:t>
+              <a:t>t</a:t>
             </a:r>
             <a:endParaRPr lang="en-US" sz="900" dirty="0"/>
           </a:p>
@@ -15173,13 +15509,13 @@
       </p:sp>
       <p:sp>
         <p:nvSpPr>
-          <p:cNvPr id="37" name="Shape 35"/>
-          <p:cNvSpPr/>
-          <p:nvPr/>
-        </p:nvSpPr>
-        <p:spPr>
-          <a:xfrm>
-            <a:off x="4850892" y="4169664"/>
+          <p:cNvPr id="40" name="Shape 38"/>
+          <p:cNvSpPr/>
+          <p:nvPr/>
+        </p:nvSpPr>
+        <p:spPr>
+          <a:xfrm>
+            <a:off x="3942207" y="4169664"/>
             <a:ext cx="685800" cy="475488"/>
           </a:xfrm>
           <a:prstGeom prst="rect">
@@ -15200,13 +15536,13 @@
       </p:sp>
       <p:sp>
         <p:nvSpPr>
-          <p:cNvPr id="38" name="Text 36"/>
-          <p:cNvSpPr/>
-          <p:nvPr/>
-        </p:nvSpPr>
-        <p:spPr>
-          <a:xfrm>
-            <a:off x="4850892" y="4169664"/>
+          <p:cNvPr id="41" name="Text 39"/>
+          <p:cNvSpPr/>
+          <p:nvPr/>
+        </p:nvSpPr>
+        <p:spPr>
+          <a:xfrm>
+            <a:off x="3942207" y="4169664"/>
             <a:ext cx="685800" cy="475488"/>
           </a:xfrm>
           <a:prstGeom prst="rect">
@@ -15231,7 +15567,7 @@
                 <a:ea typeface="Trebuchet MS" pitchFamily="34" charset="-122"/>
                 <a:cs typeface="Trebuchet MS" pitchFamily="34" charset="-120"/>
               </a:rPr>
-              <a:t>m</a:t>
+              <a:t>j</a:t>
             </a:r>
             <a:endParaRPr lang="en-US" sz="900" dirty="0"/>
           </a:p>
@@ -15239,13 +15575,13 @@
       </p:sp>
       <p:sp>
         <p:nvSpPr>
-          <p:cNvPr id="39" name="Shape 37"/>
-          <p:cNvSpPr/>
-          <p:nvPr/>
-        </p:nvSpPr>
-        <p:spPr>
-          <a:xfrm>
-            <a:off x="6062472" y="4169664"/>
+          <p:cNvPr id="42" name="Shape 40"/>
+          <p:cNvSpPr/>
+          <p:nvPr/>
+        </p:nvSpPr>
+        <p:spPr>
+          <a:xfrm>
+            <a:off x="4850892" y="4169664"/>
             <a:ext cx="685800" cy="475488"/>
           </a:xfrm>
           <a:prstGeom prst="rect">
@@ -15266,13 +15602,13 @@
       </p:sp>
       <p:sp>
         <p:nvSpPr>
-          <p:cNvPr id="40" name="Text 38"/>
-          <p:cNvSpPr/>
-          <p:nvPr/>
-        </p:nvSpPr>
-        <p:spPr>
-          <a:xfrm>
-            <a:off x="6062472" y="4169664"/>
+          <p:cNvPr id="43" name="Text 41"/>
+          <p:cNvSpPr/>
+          <p:nvPr/>
+        </p:nvSpPr>
+        <p:spPr>
+          <a:xfrm>
+            <a:off x="4850892" y="4169664"/>
             <a:ext cx="685800" cy="475488"/>
           </a:xfrm>
           <a:prstGeom prst="rect">
@@ -15297,7 +15633,7 @@
                 <a:ea typeface="Trebuchet MS" pitchFamily="34" charset="-122"/>
                 <a:cs typeface="Trebuchet MS" pitchFamily="34" charset="-120"/>
               </a:rPr>
-              <a:t>p</a:t>
+              <a:t>u</a:t>
             </a:r>
             <a:endParaRPr lang="en-US" sz="900" dirty="0"/>
           </a:p>
@@ -15305,13 +15641,13 @@
       </p:sp>
       <p:sp>
         <p:nvSpPr>
-          <p:cNvPr id="41" name="Shape 39"/>
-          <p:cNvSpPr/>
-          <p:nvPr/>
-        </p:nvSpPr>
-        <p:spPr>
-          <a:xfrm>
-            <a:off x="7274052" y="4169664"/>
+          <p:cNvPr id="44" name="Shape 42"/>
+          <p:cNvSpPr/>
+          <p:nvPr/>
+        </p:nvSpPr>
+        <p:spPr>
+          <a:xfrm>
+            <a:off x="5759577" y="4169664"/>
             <a:ext cx="685800" cy="475488"/>
           </a:xfrm>
           <a:prstGeom prst="rect">
@@ -15332,13 +15668,13 @@
       </p:sp>
       <p:sp>
         <p:nvSpPr>
-          <p:cNvPr id="42" name="Text 40"/>
-          <p:cNvSpPr/>
-          <p:nvPr/>
-        </p:nvSpPr>
-        <p:spPr>
-          <a:xfrm>
-            <a:off x="7274052" y="4169664"/>
+          <p:cNvPr id="45" name="Text 43"/>
+          <p:cNvSpPr/>
+          <p:nvPr/>
+        </p:nvSpPr>
+        <p:spPr>
+          <a:xfrm>
+            <a:off x="5759577" y="4169664"/>
             <a:ext cx="685800" cy="475488"/>
           </a:xfrm>
           <a:prstGeom prst="rect">
@@ -15363,7 +15699,139 @@
                 <a:ea typeface="Trebuchet MS" pitchFamily="34" charset="-122"/>
                 <a:cs typeface="Trebuchet MS" pitchFamily="34" charset="-120"/>
               </a:rPr>
-              <a:t>ing</a:t>
+              <a:t>m</a:t>
+            </a:r>
+            <a:endParaRPr lang="en-US" sz="900" dirty="0"/>
+          </a:p>
+        </p:txBody>
+      </p:sp>
+      <p:sp>
+        <p:nvSpPr>
+          <p:cNvPr id="46" name="Shape 44"/>
+          <p:cNvSpPr/>
+          <p:nvPr/>
+        </p:nvSpPr>
+        <p:spPr>
+          <a:xfrm>
+            <a:off x="6668262" y="4169664"/>
+            <a:ext cx="685800" cy="475488"/>
+          </a:xfrm>
+          <a:prstGeom prst="rect">
+            <a:avLst>
+              <a:gd name="adj" fmla="val 7692"/>
+            </a:avLst>
+          </a:prstGeom>
+          <a:solidFill>
+            <a:srgbClr val="FFFFFF"/>
+          </a:solidFill>
+          <a:ln w="12700">
+            <a:solidFill>
+              <a:srgbClr val="DB2777"/>
+            </a:solidFill>
+            <a:prstDash val="solid"/>
+          </a:ln>
+        </p:spPr>
+      </p:sp>
+      <p:sp>
+        <p:nvSpPr>
+          <p:cNvPr id="47" name="Text 45"/>
+          <p:cNvSpPr/>
+          <p:nvPr/>
+        </p:nvSpPr>
+        <p:spPr>
+          <a:xfrm>
+            <a:off x="6668262" y="4169664"/>
+            <a:ext cx="685800" cy="475488"/>
+          </a:xfrm>
+          <a:prstGeom prst="rect">
+            <a:avLst/>
+          </a:prstGeom>
+          <a:noFill/>
+          <a:ln/>
+        </p:spPr>
+        <p:txBody>
+          <a:bodyPr wrap="square" lIns="0" tIns="0" rIns="0" bIns="0" rtlCol="0" anchor="ctr"/>
+          <a:lstStyle/>
+          <a:p>
+            <a:pPr algn="ctr" indent="0" marL="0">
+              <a:buNone/>
+            </a:pPr>
+            <a:r>
+              <a:rPr lang="en-US" sz="900" b="1" dirty="0">
+                <a:solidFill>
+                  <a:srgbClr val="9D174D"/>
+                </a:solidFill>
+                <a:latin typeface="Trebuchet MS" pitchFamily="34" charset="0"/>
+                <a:ea typeface="Trebuchet MS" pitchFamily="34" charset="-122"/>
+                <a:cs typeface="Trebuchet MS" pitchFamily="34" charset="-120"/>
+              </a:rPr>
+              <a:t>p</a:t>
+            </a:r>
+            <a:endParaRPr lang="en-US" sz="900" dirty="0"/>
+          </a:p>
+        </p:txBody>
+      </p:sp>
+      <p:sp>
+        <p:nvSpPr>
+          <p:cNvPr id="48" name="Shape 46"/>
+          <p:cNvSpPr/>
+          <p:nvPr/>
+        </p:nvSpPr>
+        <p:spPr>
+          <a:xfrm>
+            <a:off x="7576947" y="4169664"/>
+            <a:ext cx="685800" cy="475488"/>
+          </a:xfrm>
+          <a:prstGeom prst="rect">
+            <a:avLst>
+              <a:gd name="adj" fmla="val 7692"/>
+            </a:avLst>
+          </a:prstGeom>
+          <a:solidFill>
+            <a:srgbClr val="FFFFFF"/>
+          </a:solidFill>
+          <a:ln w="12700">
+            <a:solidFill>
+              <a:srgbClr val="DB2777"/>
+            </a:solidFill>
+            <a:prstDash val="solid"/>
+          </a:ln>
+        </p:spPr>
+      </p:sp>
+      <p:sp>
+        <p:nvSpPr>
+          <p:cNvPr id="49" name="Text 47"/>
+          <p:cNvSpPr/>
+          <p:nvPr/>
+        </p:nvSpPr>
+        <p:spPr>
+          <a:xfrm>
+            <a:off x="7576947" y="4169664"/>
+            <a:ext cx="685800" cy="475488"/>
+          </a:xfrm>
+          <a:prstGeom prst="rect">
+            <a:avLst/>
+          </a:prstGeom>
+          <a:noFill/>
+          <a:ln/>
+        </p:spPr>
+        <p:txBody>
+          <a:bodyPr wrap="square" lIns="0" tIns="0" rIns="0" bIns="0" rtlCol="0" anchor="ctr"/>
+          <a:lstStyle/>
+          <a:p>
+            <a:pPr algn="ctr" indent="0" marL="0">
+              <a:buNone/>
+            </a:pPr>
+            <a:r>
+              <a:rPr lang="en-US" sz="900" b="1" dirty="0">
+                <a:solidFill>
+                  <a:srgbClr val="9D174D"/>
+                </a:solidFill>
+                <a:latin typeface="Trebuchet MS" pitchFamily="34" charset="0"/>
+                <a:ea typeface="Trebuchet MS" pitchFamily="34" charset="-122"/>
+                <a:cs typeface="Trebuchet MS" pitchFamily="34" charset="-120"/>
+              </a:rPr>
+              <a:t>t</a:t>
             </a:r>
             <a:endParaRPr lang="en-US" sz="900" dirty="0"/>
           </a:p>
@@ -16689,7 +17157,7 @@
                 <a:ea typeface="Calibri" pitchFamily="34" charset="-122"/>
                 <a:cs typeface="Calibri" pitchFamily="34" charset="-120"/>
               </a:rPr>
-              <a:t>The </a:t>
+              <a:t>She was </a:t>
             </a:r>
             <a:pPr algn="l" indent="0" marL="0">
               <a:buNone/>
@@ -16706,7 +17174,7 @@
                 <a:ea typeface="Calibri" pitchFamily="34" charset="-122"/>
                 <a:cs typeface="Calibri" pitchFamily="34" charset="-120"/>
               </a:rPr>
-              <a:t>jumper</a:t>
+              <a:t>jumping</a:t>
             </a:r>
             <a:pPr algn="l" indent="0" marL="0">
               <a:buNone/>
@@ -16720,7 +17188,7 @@
                 <a:ea typeface="Calibri" pitchFamily="34" charset="-122"/>
                 <a:cs typeface="Calibri" pitchFamily="34" charset="-120"/>
               </a:rPr>
-              <a:t> </a:t>
+              <a:t> so high that she </a:t>
             </a:r>
             <a:pPr algn="l" indent="0" marL="0">
               <a:buNone/>
@@ -16737,7 +17205,7 @@
                 <a:ea typeface="Calibri" pitchFamily="34" charset="-122"/>
                 <a:cs typeface="Calibri" pitchFamily="34" charset="-120"/>
               </a:rPr>
-              <a:t>outjumped</a:t>
+              <a:t>overjumped</a:t>
             </a:r>
             <a:pPr algn="l" indent="0" marL="0">
               <a:buNone/>
@@ -16751,7 +17219,7 @@
                 <a:ea typeface="Calibri" pitchFamily="34" charset="-122"/>
                 <a:cs typeface="Calibri" pitchFamily="34" charset="-120"/>
               </a:rPr>
-              <a:t> her rivals, and the crowd watched the </a:t>
+              <a:t> the bar, and the crowd cheered for the </a:t>
             </a:r>
             <a:pPr algn="l" indent="0" marL="0">
               <a:buNone/>
@@ -16768,7 +17236,7 @@
                 <a:ea typeface="Calibri" pitchFamily="34" charset="-122"/>
                 <a:cs typeface="Calibri" pitchFamily="34" charset="-120"/>
               </a:rPr>
-              <a:t>jumping</a:t>
+              <a:t>jumper</a:t>
             </a:r>
             <a:pPr algn="l" indent="0" marL="0">
               <a:buNone/>
@@ -16782,7 +17250,7 @@
                 <a:ea typeface="Calibri" pitchFamily="34" charset="-122"/>
                 <a:cs typeface="Calibri" pitchFamily="34" charset="-120"/>
               </a:rPr>
-              <a:t> competition in amazement.</a:t>
+              <a:t>!</a:t>
             </a:r>
             <a:endParaRPr lang="en-US" sz="1800" dirty="0"/>
           </a:p>
@@ -16937,7 +17405,7 @@
                 <a:ea typeface="Trebuchet MS" pitchFamily="34" charset="-122"/>
                 <a:cs typeface="Trebuchet MS" pitchFamily="34" charset="-120"/>
               </a:rPr>
-              <a:t>jumper</a:t>
+              <a:t>jumping</a:t>
             </a:r>
             <a:endParaRPr lang="en-US" sz="1400" dirty="0"/>
           </a:p>
@@ -17065,7 +17533,7 @@
                 <a:ea typeface="Trebuchet MS" pitchFamily="34" charset="-122"/>
                 <a:cs typeface="Trebuchet MS" pitchFamily="34" charset="-120"/>
               </a:rPr>
-              <a:t>outjumped</a:t>
+              <a:t>overjumped</a:t>
             </a:r>
             <a:endParaRPr lang="en-US" sz="1400" dirty="0"/>
           </a:p>
@@ -17193,7 +17661,7 @@
                 <a:ea typeface="Trebuchet MS" pitchFamily="34" charset="-122"/>
                 <a:cs typeface="Trebuchet MS" pitchFamily="34" charset="-120"/>
               </a:rPr>
-              <a:t>jumping</a:t>
+              <a:t>jumper</a:t>
             </a:r>
             <a:endParaRPr lang="en-US" sz="1400" dirty="0"/>
           </a:p>
@@ -17663,7 +18131,7 @@
                 <a:ea typeface="Trebuchet MS" pitchFamily="34" charset="-122"/>
                 <a:cs typeface="Trebuchet MS" pitchFamily="34" charset="-120"/>
               </a:rPr>
-              <a:t>jumper</a:t>
+              <a:t>jumping</a:t>
             </a:r>
             <a:endParaRPr lang="en-US" sz="2800" dirty="0"/>
           </a:p>
@@ -18490,7 +18958,7 @@
                 <a:ea typeface="Trebuchet MS" pitchFamily="34" charset="-122"/>
                 <a:cs typeface="Trebuchet MS" pitchFamily="34" charset="-120"/>
               </a:rPr>
-              <a:t>jumper</a:t>
+              <a:t>jumping</a:t>
             </a:r>
             <a:endParaRPr lang="en-US" sz="2800" dirty="0"/>
           </a:p>
@@ -18741,7 +19209,7 @@
                 <a:ea typeface="Trebuchet MS" pitchFamily="34" charset="-122"/>
                 <a:cs typeface="Trebuchet MS" pitchFamily="34" charset="-120"/>
               </a:rPr>
-              <a:t>er</a:t>
+              <a:t>ing</a:t>
             </a:r>
             <a:endParaRPr lang="en-US" sz="1300" dirty="0"/>
           </a:p>
@@ -18780,7 +19248,7 @@
                 <a:ea typeface="Calibri" pitchFamily="34" charset="-122"/>
                 <a:cs typeface="Calibri" pitchFamily="34" charset="-120"/>
               </a:rPr>
-              <a:t>a person who does something</a:t>
+              <a:t>happening right now</a:t>
             </a:r>
             <a:endParaRPr lang="en-US" sz="850" dirty="0"/>
           </a:p>
@@ -19475,7 +19943,7 @@
                 <a:ea typeface="Trebuchet MS" pitchFamily="34" charset="-122"/>
                 <a:cs typeface="Trebuchet MS" pitchFamily="34" charset="-120"/>
               </a:rPr>
-              <a:t>jumper</a:t>
+              <a:t>jumping</a:t>
             </a:r>
             <a:endParaRPr lang="en-US" sz="2800" dirty="0"/>
           </a:p>
@@ -19726,7 +20194,7 @@
                 <a:ea typeface="Trebuchet MS" pitchFamily="34" charset="-122"/>
                 <a:cs typeface="Trebuchet MS" pitchFamily="34" charset="-120"/>
               </a:rPr>
-              <a:t>er</a:t>
+              <a:t>ing</a:t>
             </a:r>
             <a:endParaRPr lang="en-US" sz="1300" dirty="0"/>
           </a:p>
@@ -19765,7 +20233,7 @@
                 <a:ea typeface="Calibri" pitchFamily="34" charset="-122"/>
                 <a:cs typeface="Calibri" pitchFamily="34" charset="-120"/>
               </a:rPr>
-              <a:t>a person who does something</a:t>
+              <a:t>happening right now</a:t>
             </a:r>
             <a:endParaRPr lang="en-US" sz="850" dirty="0"/>
           </a:p>
@@ -20029,7 +20497,7 @@
                 <a:ea typeface="Trebuchet MS" pitchFamily="34" charset="-122"/>
                 <a:cs typeface="Trebuchet MS" pitchFamily="34" charset="-120"/>
               </a:rPr>
-              <a:t>er</a:t>
+              <a:t>ing</a:t>
             </a:r>
             <a:endParaRPr lang="en-US" sz="1400" dirty="0"/>
           </a:p>
@@ -20592,7 +21060,7 @@
                 <a:ea typeface="Trebuchet MS" pitchFamily="34" charset="-122"/>
                 <a:cs typeface="Trebuchet MS" pitchFamily="34" charset="-120"/>
               </a:rPr>
-              <a:t>jumper</a:t>
+              <a:t>jumping</a:t>
             </a:r>
             <a:endParaRPr lang="en-US" sz="2800" dirty="0"/>
           </a:p>
@@ -20843,7 +21311,7 @@
                 <a:ea typeface="Trebuchet MS" pitchFamily="34" charset="-122"/>
                 <a:cs typeface="Trebuchet MS" pitchFamily="34" charset="-120"/>
               </a:rPr>
-              <a:t>er</a:t>
+              <a:t>ing</a:t>
             </a:r>
             <a:endParaRPr lang="en-US" sz="1300" dirty="0"/>
           </a:p>
@@ -20882,7 +21350,7 @@
                 <a:ea typeface="Calibri" pitchFamily="34" charset="-122"/>
                 <a:cs typeface="Calibri" pitchFamily="34" charset="-120"/>
               </a:rPr>
-              <a:t>a person who does something</a:t>
+              <a:t>happening right now</a:t>
             </a:r>
             <a:endParaRPr lang="en-US" sz="850" dirty="0"/>
           </a:p>
@@ -21146,7 +21614,7 @@
                 <a:ea typeface="Trebuchet MS" pitchFamily="34" charset="-122"/>
                 <a:cs typeface="Trebuchet MS" pitchFamily="34" charset="-120"/>
               </a:rPr>
-              <a:t>er</a:t>
+              <a:t>ing</a:t>
             </a:r>
             <a:endParaRPr lang="en-US" sz="1400" dirty="0"/>
           </a:p>
@@ -21253,7 +21721,7 @@
         </p:nvSpPr>
         <p:spPr>
           <a:xfrm>
-            <a:off x="2427732" y="4169664"/>
+            <a:off x="2254649" y="4169664"/>
             <a:ext cx="685800" cy="475488"/>
           </a:xfrm>
           <a:prstGeom prst="rect">
@@ -21280,7 +21748,7 @@
         </p:nvSpPr>
         <p:spPr>
           <a:xfrm>
-            <a:off x="2427732" y="4169664"/>
+            <a:off x="2254649" y="4169664"/>
             <a:ext cx="685800" cy="475488"/>
           </a:xfrm>
           <a:prstGeom prst="rect">
@@ -21319,7 +21787,7 @@
         </p:nvSpPr>
         <p:spPr>
           <a:xfrm>
-            <a:off x="3639312" y="4169664"/>
+            <a:off x="3293146" y="4169664"/>
             <a:ext cx="685800" cy="475488"/>
           </a:xfrm>
           <a:prstGeom prst="rect">
@@ -21346,7 +21814,7 @@
         </p:nvSpPr>
         <p:spPr>
           <a:xfrm>
-            <a:off x="3639312" y="4169664"/>
+            <a:off x="3293146" y="4169664"/>
             <a:ext cx="685800" cy="475488"/>
           </a:xfrm>
           <a:prstGeom prst="rect">
@@ -21385,7 +21853,7 @@
         </p:nvSpPr>
         <p:spPr>
           <a:xfrm>
-            <a:off x="4850892" y="4169664"/>
+            <a:off x="4331643" y="4169664"/>
             <a:ext cx="685800" cy="475488"/>
           </a:xfrm>
           <a:prstGeom prst="rect">
@@ -21412,7 +21880,7 @@
         </p:nvSpPr>
         <p:spPr>
           <a:xfrm>
-            <a:off x="4850892" y="4169664"/>
+            <a:off x="4331643" y="4169664"/>
             <a:ext cx="685800" cy="475488"/>
           </a:xfrm>
           <a:prstGeom prst="rect">
@@ -21451,7 +21919,7 @@
         </p:nvSpPr>
         <p:spPr>
           <a:xfrm>
-            <a:off x="6062472" y="4169664"/>
+            <a:off x="5370141" y="4169664"/>
             <a:ext cx="685800" cy="475488"/>
           </a:xfrm>
           <a:prstGeom prst="rect">
@@ -21478,7 +21946,7 @@
         </p:nvSpPr>
         <p:spPr>
           <a:xfrm>
-            <a:off x="6062472" y="4169664"/>
+            <a:off x="5370141" y="4169664"/>
             <a:ext cx="685800" cy="475488"/>
           </a:xfrm>
           <a:prstGeom prst="rect">
@@ -21517,7 +21985,7 @@
         </p:nvSpPr>
         <p:spPr>
           <a:xfrm>
-            <a:off x="7274052" y="4169664"/>
+            <a:off x="6408638" y="4169664"/>
             <a:ext cx="685800" cy="475488"/>
           </a:xfrm>
           <a:prstGeom prst="rect">
@@ -21544,7 +22012,7 @@
         </p:nvSpPr>
         <p:spPr>
           <a:xfrm>
-            <a:off x="7274052" y="4169664"/>
+            <a:off x="6408638" y="4169664"/>
             <a:ext cx="685800" cy="475488"/>
           </a:xfrm>
           <a:prstGeom prst="rect">
@@ -21569,7 +22037,73 @@
                 <a:ea typeface="Trebuchet MS" pitchFamily="34" charset="-122"/>
                 <a:cs typeface="Trebuchet MS" pitchFamily="34" charset="-120"/>
               </a:rPr>
-              <a:t>er</a:t>
+              <a:t>i</a:t>
+            </a:r>
+            <a:endParaRPr lang="en-US" sz="900" dirty="0"/>
+          </a:p>
+        </p:txBody>
+      </p:sp>
+      <p:sp>
+        <p:nvSpPr>
+          <p:cNvPr id="43" name="Shape 41"/>
+          <p:cNvSpPr/>
+          <p:nvPr/>
+        </p:nvSpPr>
+        <p:spPr>
+          <a:xfrm>
+            <a:off x="7447135" y="4169664"/>
+            <a:ext cx="685800" cy="475488"/>
+          </a:xfrm>
+          <a:prstGeom prst="rect">
+            <a:avLst>
+              <a:gd name="adj" fmla="val 7692"/>
+            </a:avLst>
+          </a:prstGeom>
+          <a:solidFill>
+            <a:srgbClr val="FFFFFF"/>
+          </a:solidFill>
+          <a:ln w="12700">
+            <a:solidFill>
+              <a:srgbClr val="DB2777"/>
+            </a:solidFill>
+            <a:prstDash val="solid"/>
+          </a:ln>
+        </p:spPr>
+      </p:sp>
+      <p:sp>
+        <p:nvSpPr>
+          <p:cNvPr id="44" name="Text 42"/>
+          <p:cNvSpPr/>
+          <p:nvPr/>
+        </p:nvSpPr>
+        <p:spPr>
+          <a:xfrm>
+            <a:off x="7447135" y="4169664"/>
+            <a:ext cx="685800" cy="475488"/>
+          </a:xfrm>
+          <a:prstGeom prst="rect">
+            <a:avLst/>
+          </a:prstGeom>
+          <a:noFill/>
+          <a:ln/>
+        </p:spPr>
+        <p:txBody>
+          <a:bodyPr wrap="square" lIns="0" tIns="0" rIns="0" bIns="0" rtlCol="0" anchor="ctr"/>
+          <a:lstStyle/>
+          <a:p>
+            <a:pPr algn="ctr" indent="0" marL="0">
+              <a:buNone/>
+            </a:pPr>
+            <a:r>
+              <a:rPr lang="en-US" sz="900" b="1" dirty="0">
+                <a:solidFill>
+                  <a:srgbClr val="9D174D"/>
+                </a:solidFill>
+                <a:latin typeface="Trebuchet MS" pitchFamily="34" charset="0"/>
+                <a:ea typeface="Trebuchet MS" pitchFamily="34" charset="-122"/>
+                <a:cs typeface="Trebuchet MS" pitchFamily="34" charset="-120"/>
+              </a:rPr>
+              <a:t>ng</a:t>
             </a:r>
             <a:endParaRPr lang="en-US" sz="900" dirty="0"/>
           </a:p>
@@ -22000,7 +22534,7 @@
                 <a:ea typeface="Trebuchet MS" pitchFamily="34" charset="-122"/>
                 <a:cs typeface="Trebuchet MS" pitchFamily="34" charset="-120"/>
               </a:rPr>
-              <a:t>outjumped</a:t>
+              <a:t>overjumped</a:t>
             </a:r>
             <a:endParaRPr lang="en-US" sz="2800" dirty="0"/>
           </a:p>
@@ -22827,7 +23361,7 @@
                 <a:ea typeface="Trebuchet MS" pitchFamily="34" charset="-122"/>
                 <a:cs typeface="Trebuchet MS" pitchFamily="34" charset="-120"/>
               </a:rPr>
-              <a:t>outjumped</a:t>
+              <a:t>overjumped</a:t>
             </a:r>
             <a:endParaRPr lang="en-US" sz="2800" dirty="0"/>
           </a:p>
@@ -22966,7 +23500,7 @@
                 <a:ea typeface="Trebuchet MS" pitchFamily="34" charset="-122"/>
                 <a:cs typeface="Trebuchet MS" pitchFamily="34" charset="-120"/>
               </a:rPr>
-              <a:t>out</a:t>
+              <a:t>over</a:t>
             </a:r>
             <a:endParaRPr lang="en-US" sz="1300" dirty="0"/>
           </a:p>
@@ -23005,7 +23539,7 @@
                 <a:ea typeface="Calibri" pitchFamily="34" charset="-122"/>
                 <a:cs typeface="Calibri" pitchFamily="34" charset="-120"/>
               </a:rPr>
-              <a:t>beyond or more than</a:t>
+              <a:t>too much or above</a:t>
             </a:r>
             <a:endParaRPr lang="en-US" sz="850" dirty="0"/>
           </a:p>
@@ -23229,7 +23763,7 @@
                 <a:ea typeface="Calibri" pitchFamily="34" charset="-122"/>
                 <a:cs typeface="Calibri" pitchFamily="34" charset="-120"/>
               </a:rPr>
-              <a:t>happened in the past</a:t>
+              <a:t>past tense</a:t>
             </a:r>
             <a:endParaRPr lang="en-US" sz="850" dirty="0"/>
           </a:p>
@@ -24643,7 +25177,7 @@
                 <a:ea typeface="Trebuchet MS" pitchFamily="34" charset="-122"/>
                 <a:cs typeface="Trebuchet MS" pitchFamily="34" charset="-120"/>
               </a:rPr>
-              <a:t>outjumped</a:t>
+              <a:t>overjumped</a:t>
             </a:r>
             <a:endParaRPr lang="en-US" sz="2800" dirty="0"/>
           </a:p>
@@ -24782,7 +25316,7 @@
                 <a:ea typeface="Trebuchet MS" pitchFamily="34" charset="-122"/>
                 <a:cs typeface="Trebuchet MS" pitchFamily="34" charset="-120"/>
               </a:rPr>
-              <a:t>out</a:t>
+              <a:t>over</a:t>
             </a:r>
             <a:endParaRPr lang="en-US" sz="1300" dirty="0"/>
           </a:p>
@@ -24821,7 +25355,7 @@
                 <a:ea typeface="Calibri" pitchFamily="34" charset="-122"/>
                 <a:cs typeface="Calibri" pitchFamily="34" charset="-120"/>
               </a:rPr>
-              <a:t>beyond or more than</a:t>
+              <a:t>too much or above</a:t>
             </a:r>
             <a:endParaRPr lang="en-US" sz="850" dirty="0"/>
           </a:p>
@@ -25045,7 +25579,7 @@
                 <a:ea typeface="Calibri" pitchFamily="34" charset="-122"/>
                 <a:cs typeface="Calibri" pitchFamily="34" charset="-120"/>
               </a:rPr>
-              <a:t>happened in the past</a:t>
+              <a:t>past tense</a:t>
             </a:r>
             <a:endParaRPr lang="en-US" sz="850" dirty="0"/>
           </a:p>
@@ -25152,7 +25686,7 @@
         </p:nvSpPr>
         <p:spPr>
           <a:xfrm>
-            <a:off x="2999232" y="3364992"/>
+            <a:off x="2313432" y="3364992"/>
             <a:ext cx="1645920" cy="475488"/>
           </a:xfrm>
           <a:prstGeom prst="rect">
@@ -25179,7 +25713,7 @@
         </p:nvSpPr>
         <p:spPr>
           <a:xfrm>
-            <a:off x="2999232" y="3364992"/>
+            <a:off x="2313432" y="3364992"/>
             <a:ext cx="1645920" cy="475488"/>
           </a:xfrm>
           <a:prstGeom prst="rect">
@@ -25204,7 +25738,7 @@
                 <a:ea typeface="Trebuchet MS" pitchFamily="34" charset="-122"/>
                 <a:cs typeface="Trebuchet MS" pitchFamily="34" charset="-120"/>
               </a:rPr>
-              <a:t>out</a:t>
+              <a:t>o</a:t>
             </a:r>
             <a:endParaRPr lang="en-US" sz="1400" dirty="0"/>
           </a:p>
@@ -25218,8 +25752,8 @@
         </p:nvSpPr>
         <p:spPr>
           <a:xfrm>
-            <a:off x="4645152" y="3364992"/>
-            <a:ext cx="1097280" cy="475488"/>
+            <a:off x="3959352" y="3364992"/>
+            <a:ext cx="411480" cy="475488"/>
           </a:xfrm>
           <a:prstGeom prst="rect">
             <a:avLst/>
@@ -25257,7 +25791,7 @@
         </p:nvSpPr>
         <p:spPr>
           <a:xfrm>
-            <a:off x="5742432" y="3364992"/>
+            <a:off x="4370832" y="3364992"/>
             <a:ext cx="1645920" cy="475488"/>
           </a:xfrm>
           <a:prstGeom prst="rect">
@@ -25284,7 +25818,7 @@
         </p:nvSpPr>
         <p:spPr>
           <a:xfrm>
-            <a:off x="5742432" y="3364992"/>
+            <a:off x="4370832" y="3364992"/>
             <a:ext cx="1645920" cy="475488"/>
           </a:xfrm>
           <a:prstGeom prst="rect">
@@ -25309,6 +25843,111 @@
                 <a:ea typeface="Trebuchet MS" pitchFamily="34" charset="-122"/>
                 <a:cs typeface="Trebuchet MS" pitchFamily="34" charset="-120"/>
               </a:rPr>
+              <a:t>ver</a:t>
+            </a:r>
+            <a:endParaRPr lang="en-US" sz="1400" dirty="0"/>
+          </a:p>
+        </p:txBody>
+      </p:sp>
+      <p:sp>
+        <p:nvSpPr>
+          <p:cNvPr id="33" name="Text 31"/>
+          <p:cNvSpPr/>
+          <p:nvPr/>
+        </p:nvSpPr>
+        <p:spPr>
+          <a:xfrm>
+            <a:off x="6016752" y="3364992"/>
+            <a:ext cx="411480" cy="475488"/>
+          </a:xfrm>
+          <a:prstGeom prst="rect">
+            <a:avLst/>
+          </a:prstGeom>
+          <a:noFill/>
+          <a:ln/>
+        </p:spPr>
+        <p:txBody>
+          <a:bodyPr wrap="square" lIns="0" tIns="0" rIns="0" bIns="0" rtlCol="0" anchor="ctr"/>
+          <a:lstStyle/>
+          <a:p>
+            <a:pPr algn="ctr" indent="0" marL="0">
+              <a:buNone/>
+            </a:pPr>
+            <a:r>
+              <a:rPr lang="en-US" sz="1600" b="1" dirty="0">
+                <a:solidFill>
+                  <a:srgbClr val="0D9488"/>
+                </a:solidFill>
+                <a:latin typeface="Trebuchet MS" pitchFamily="34" charset="0"/>
+                <a:ea typeface="Trebuchet MS" pitchFamily="34" charset="-122"/>
+                <a:cs typeface="Trebuchet MS" pitchFamily="34" charset="-120"/>
+              </a:rPr>
+              <a:t>·</a:t>
+            </a:r>
+            <a:endParaRPr lang="en-US" sz="1600" dirty="0"/>
+          </a:p>
+        </p:txBody>
+      </p:sp>
+      <p:sp>
+        <p:nvSpPr>
+          <p:cNvPr id="34" name="Shape 32"/>
+          <p:cNvSpPr/>
+          <p:nvPr/>
+        </p:nvSpPr>
+        <p:spPr>
+          <a:xfrm>
+            <a:off x="6428232" y="3364992"/>
+            <a:ext cx="1645920" cy="475488"/>
+          </a:xfrm>
+          <a:prstGeom prst="rect">
+            <a:avLst>
+              <a:gd name="adj" fmla="val 9615"/>
+            </a:avLst>
+          </a:prstGeom>
+          <a:solidFill>
+            <a:srgbClr val="FFFFFF"/>
+          </a:solidFill>
+          <a:ln w="12700">
+            <a:solidFill>
+              <a:srgbClr val="0D9488"/>
+            </a:solidFill>
+            <a:prstDash val="solid"/>
+          </a:ln>
+        </p:spPr>
+      </p:sp>
+      <p:sp>
+        <p:nvSpPr>
+          <p:cNvPr id="35" name="Text 33"/>
+          <p:cNvSpPr/>
+          <p:nvPr/>
+        </p:nvSpPr>
+        <p:spPr>
+          <a:xfrm>
+            <a:off x="6428232" y="3364992"/>
+            <a:ext cx="1645920" cy="475488"/>
+          </a:xfrm>
+          <a:prstGeom prst="rect">
+            <a:avLst/>
+          </a:prstGeom>
+          <a:noFill/>
+          <a:ln/>
+        </p:spPr>
+        <p:txBody>
+          <a:bodyPr wrap="square" lIns="0" tIns="0" rIns="0" bIns="0" rtlCol="0" anchor="ctr"/>
+          <a:lstStyle/>
+          <a:p>
+            <a:pPr algn="ctr" indent="0" marL="0">
+              <a:buNone/>
+            </a:pPr>
+            <a:r>
+              <a:rPr lang="en-US" sz="1400" b="1" dirty="0">
+                <a:solidFill>
+                  <a:srgbClr val="0D9488"/>
+                </a:solidFill>
+                <a:latin typeface="Trebuchet MS" pitchFamily="34" charset="0"/>
+                <a:ea typeface="Trebuchet MS" pitchFamily="34" charset="-122"/>
+                <a:cs typeface="Trebuchet MS" pitchFamily="34" charset="-120"/>
+              </a:rPr>
               <a:t>jumped</a:t>
             </a:r>
             <a:endParaRPr lang="en-US" sz="1400" dirty="0"/>
@@ -25317,7 +25956,7 @@
       </p:sp>
       <p:sp>
         <p:nvSpPr>
-          <p:cNvPr id="33" name="Shape 31"/>
+          <p:cNvPr id="36" name="Shape 34"/>
           <p:cNvSpPr/>
           <p:nvPr/>
         </p:nvSpPr>
@@ -25344,7 +25983,7 @@
       </p:sp>
       <p:sp>
         <p:nvSpPr>
-          <p:cNvPr id="34" name="Text 32"/>
+          <p:cNvPr id="37" name="Text 35"/>
           <p:cNvSpPr/>
           <p:nvPr/>
         </p:nvSpPr>
@@ -25383,7 +26022,7 @@
       </p:sp>
       <p:sp>
         <p:nvSpPr>
-          <p:cNvPr id="35" name="Shape 33"/>
+          <p:cNvPr id="38" name="Shape 36"/>
           <p:cNvSpPr/>
           <p:nvPr/>
         </p:nvSpPr>
@@ -25410,7 +26049,7 @@
       </p:sp>
       <p:sp>
         <p:nvSpPr>
-          <p:cNvPr id="36" name="Text 34"/>
+          <p:cNvPr id="39" name="Text 37"/>
           <p:cNvSpPr/>
           <p:nvPr/>
         </p:nvSpPr>
@@ -25872,7 +26511,7 @@
                 <a:ea typeface="Trebuchet MS" pitchFamily="34" charset="-122"/>
                 <a:cs typeface="Trebuchet MS" pitchFamily="34" charset="-120"/>
               </a:rPr>
-              <a:t>outjumped</a:t>
+              <a:t>overjumped</a:t>
             </a:r>
             <a:endParaRPr lang="en-US" sz="2800" dirty="0"/>
           </a:p>
@@ -26011,7 +26650,7 @@
                 <a:ea typeface="Trebuchet MS" pitchFamily="34" charset="-122"/>
                 <a:cs typeface="Trebuchet MS" pitchFamily="34" charset="-120"/>
               </a:rPr>
-              <a:t>out</a:t>
+              <a:t>over</a:t>
             </a:r>
             <a:endParaRPr lang="en-US" sz="1300" dirty="0"/>
           </a:p>
@@ -26050,7 +26689,7 @@
                 <a:ea typeface="Calibri" pitchFamily="34" charset="-122"/>
                 <a:cs typeface="Calibri" pitchFamily="34" charset="-120"/>
               </a:rPr>
-              <a:t>beyond or more than</a:t>
+              <a:t>too much or above</a:t>
             </a:r>
             <a:endParaRPr lang="en-US" sz="850" dirty="0"/>
           </a:p>
@@ -26274,7 +26913,7 @@
                 <a:ea typeface="Calibri" pitchFamily="34" charset="-122"/>
                 <a:cs typeface="Calibri" pitchFamily="34" charset="-120"/>
               </a:rPr>
-              <a:t>happened in the past</a:t>
+              <a:t>past tense</a:t>
             </a:r>
             <a:endParaRPr lang="en-US" sz="850" dirty="0"/>
           </a:p>
@@ -26381,7 +27020,7 @@
         </p:nvSpPr>
         <p:spPr>
           <a:xfrm>
-            <a:off x="2999232" y="3364992"/>
+            <a:off x="2313432" y="3364992"/>
             <a:ext cx="1645920" cy="475488"/>
           </a:xfrm>
           <a:prstGeom prst="rect">
@@ -26408,7 +27047,7 @@
         </p:nvSpPr>
         <p:spPr>
           <a:xfrm>
-            <a:off x="2999232" y="3364992"/>
+            <a:off x="2313432" y="3364992"/>
             <a:ext cx="1645920" cy="475488"/>
           </a:xfrm>
           <a:prstGeom prst="rect">
@@ -26433,7 +27072,7 @@
                 <a:ea typeface="Trebuchet MS" pitchFamily="34" charset="-122"/>
                 <a:cs typeface="Trebuchet MS" pitchFamily="34" charset="-120"/>
               </a:rPr>
-              <a:t>out</a:t>
+              <a:t>o</a:t>
             </a:r>
             <a:endParaRPr lang="en-US" sz="1400" dirty="0"/>
           </a:p>
@@ -26447,8 +27086,8 @@
         </p:nvSpPr>
         <p:spPr>
           <a:xfrm>
-            <a:off x="4645152" y="3364992"/>
-            <a:ext cx="1097280" cy="475488"/>
+            <a:off x="3959352" y="3364992"/>
+            <a:ext cx="411480" cy="475488"/>
           </a:xfrm>
           <a:prstGeom prst="rect">
             <a:avLst/>
@@ -26486,7 +27125,7 @@
         </p:nvSpPr>
         <p:spPr>
           <a:xfrm>
-            <a:off x="5742432" y="3364992"/>
+            <a:off x="4370832" y="3364992"/>
             <a:ext cx="1645920" cy="475488"/>
           </a:xfrm>
           <a:prstGeom prst="rect">
@@ -26513,7 +27152,7 @@
         </p:nvSpPr>
         <p:spPr>
           <a:xfrm>
-            <a:off x="5742432" y="3364992"/>
+            <a:off x="4370832" y="3364992"/>
             <a:ext cx="1645920" cy="475488"/>
           </a:xfrm>
           <a:prstGeom prst="rect">
@@ -26538,6 +27177,111 @@
                 <a:ea typeface="Trebuchet MS" pitchFamily="34" charset="-122"/>
                 <a:cs typeface="Trebuchet MS" pitchFamily="34" charset="-120"/>
               </a:rPr>
+              <a:t>ver</a:t>
+            </a:r>
+            <a:endParaRPr lang="en-US" sz="1400" dirty="0"/>
+          </a:p>
+        </p:txBody>
+      </p:sp>
+      <p:sp>
+        <p:nvSpPr>
+          <p:cNvPr id="33" name="Text 31"/>
+          <p:cNvSpPr/>
+          <p:nvPr/>
+        </p:nvSpPr>
+        <p:spPr>
+          <a:xfrm>
+            <a:off x="6016752" y="3364992"/>
+            <a:ext cx="411480" cy="475488"/>
+          </a:xfrm>
+          <a:prstGeom prst="rect">
+            <a:avLst/>
+          </a:prstGeom>
+          <a:noFill/>
+          <a:ln/>
+        </p:spPr>
+        <p:txBody>
+          <a:bodyPr wrap="square" lIns="0" tIns="0" rIns="0" bIns="0" rtlCol="0" anchor="ctr"/>
+          <a:lstStyle/>
+          <a:p>
+            <a:pPr algn="ctr" indent="0" marL="0">
+              <a:buNone/>
+            </a:pPr>
+            <a:r>
+              <a:rPr lang="en-US" sz="1600" b="1" dirty="0">
+                <a:solidFill>
+                  <a:srgbClr val="0D9488"/>
+                </a:solidFill>
+                <a:latin typeface="Trebuchet MS" pitchFamily="34" charset="0"/>
+                <a:ea typeface="Trebuchet MS" pitchFamily="34" charset="-122"/>
+                <a:cs typeface="Trebuchet MS" pitchFamily="34" charset="-120"/>
+              </a:rPr>
+              <a:t>·</a:t>
+            </a:r>
+            <a:endParaRPr lang="en-US" sz="1600" dirty="0"/>
+          </a:p>
+        </p:txBody>
+      </p:sp>
+      <p:sp>
+        <p:nvSpPr>
+          <p:cNvPr id="34" name="Shape 32"/>
+          <p:cNvSpPr/>
+          <p:nvPr/>
+        </p:nvSpPr>
+        <p:spPr>
+          <a:xfrm>
+            <a:off x="6428232" y="3364992"/>
+            <a:ext cx="1645920" cy="475488"/>
+          </a:xfrm>
+          <a:prstGeom prst="rect">
+            <a:avLst>
+              <a:gd name="adj" fmla="val 9615"/>
+            </a:avLst>
+          </a:prstGeom>
+          <a:solidFill>
+            <a:srgbClr val="FFFFFF"/>
+          </a:solidFill>
+          <a:ln w="12700">
+            <a:solidFill>
+              <a:srgbClr val="0D9488"/>
+            </a:solidFill>
+            <a:prstDash val="solid"/>
+          </a:ln>
+        </p:spPr>
+      </p:sp>
+      <p:sp>
+        <p:nvSpPr>
+          <p:cNvPr id="35" name="Text 33"/>
+          <p:cNvSpPr/>
+          <p:nvPr/>
+        </p:nvSpPr>
+        <p:spPr>
+          <a:xfrm>
+            <a:off x="6428232" y="3364992"/>
+            <a:ext cx="1645920" cy="475488"/>
+          </a:xfrm>
+          <a:prstGeom prst="rect">
+            <a:avLst/>
+          </a:prstGeom>
+          <a:noFill/>
+          <a:ln/>
+        </p:spPr>
+        <p:txBody>
+          <a:bodyPr wrap="square" lIns="0" tIns="0" rIns="0" bIns="0" rtlCol="0" anchor="ctr"/>
+          <a:lstStyle/>
+          <a:p>
+            <a:pPr algn="ctr" indent="0" marL="0">
+              <a:buNone/>
+            </a:pPr>
+            <a:r>
+              <a:rPr lang="en-US" sz="1400" b="1" dirty="0">
+                <a:solidFill>
+                  <a:srgbClr val="0D9488"/>
+                </a:solidFill>
+                <a:latin typeface="Trebuchet MS" pitchFamily="34" charset="0"/>
+                <a:ea typeface="Trebuchet MS" pitchFamily="34" charset="-122"/>
+                <a:cs typeface="Trebuchet MS" pitchFamily="34" charset="-120"/>
+              </a:rPr>
               <a:t>jumped</a:t>
             </a:r>
             <a:endParaRPr lang="en-US" sz="1400" dirty="0"/>
@@ -26546,7 +27290,7 @@
       </p:sp>
       <p:sp>
         <p:nvSpPr>
-          <p:cNvPr id="33" name="Shape 31"/>
+          <p:cNvPr id="36" name="Shape 34"/>
           <p:cNvSpPr/>
           <p:nvPr/>
         </p:nvSpPr>
@@ -26573,7 +27317,7 @@
       </p:sp>
       <p:sp>
         <p:nvSpPr>
-          <p:cNvPr id="34" name="Text 32"/>
+          <p:cNvPr id="37" name="Text 35"/>
           <p:cNvSpPr/>
           <p:nvPr/>
         </p:nvSpPr>
@@ -26612,7 +27356,7 @@
       </p:sp>
       <p:sp>
         <p:nvSpPr>
-          <p:cNvPr id="35" name="Shape 33"/>
+          <p:cNvPr id="38" name="Shape 36"/>
           <p:cNvSpPr/>
           <p:nvPr/>
         </p:nvSpPr>
@@ -26639,13 +27383,13 @@
       </p:sp>
       <p:sp>
         <p:nvSpPr>
-          <p:cNvPr id="36" name="Shape 34"/>
-          <p:cNvSpPr/>
-          <p:nvPr/>
-        </p:nvSpPr>
-        <p:spPr>
-          <a:xfrm>
-            <a:off x="2124837" y="4169664"/>
+          <p:cNvPr id="39" name="Shape 37"/>
+          <p:cNvSpPr/>
+          <p:nvPr/>
+        </p:nvSpPr>
+        <p:spPr>
+          <a:xfrm>
+            <a:off x="2023872" y="4169664"/>
             <a:ext cx="685800" cy="475488"/>
           </a:xfrm>
           <a:prstGeom prst="rect">
@@ -26666,13 +27410,13 @@
       </p:sp>
       <p:sp>
         <p:nvSpPr>
-          <p:cNvPr id="37" name="Text 35"/>
-          <p:cNvSpPr/>
-          <p:nvPr/>
-        </p:nvSpPr>
-        <p:spPr>
-          <a:xfrm>
-            <a:off x="2124837" y="4169664"/>
+          <p:cNvPr id="40" name="Text 38"/>
+          <p:cNvSpPr/>
+          <p:nvPr/>
+        </p:nvSpPr>
+        <p:spPr>
+          <a:xfrm>
+            <a:off x="2023872" y="4169664"/>
             <a:ext cx="685800" cy="475488"/>
           </a:xfrm>
           <a:prstGeom prst="rect">
@@ -26697,7 +27441,7 @@
                 <a:ea typeface="Trebuchet MS" pitchFamily="34" charset="-122"/>
                 <a:cs typeface="Trebuchet MS" pitchFamily="34" charset="-120"/>
               </a:rPr>
-              <a:t>ou</a:t>
+              <a:t>o</a:t>
             </a:r>
             <a:endParaRPr lang="en-US" sz="900" dirty="0"/>
           </a:p>
@@ -26705,13 +27449,13 @@
       </p:sp>
       <p:sp>
         <p:nvSpPr>
-          <p:cNvPr id="38" name="Shape 36"/>
-          <p:cNvSpPr/>
-          <p:nvPr/>
-        </p:nvSpPr>
-        <p:spPr>
-          <a:xfrm>
-            <a:off x="3033522" y="4169664"/>
+          <p:cNvPr id="41" name="Shape 39"/>
+          <p:cNvSpPr/>
+          <p:nvPr/>
+        </p:nvSpPr>
+        <p:spPr>
+          <a:xfrm>
+            <a:off x="2831592" y="4169664"/>
             <a:ext cx="685800" cy="475488"/>
           </a:xfrm>
           <a:prstGeom prst="rect">
@@ -26732,13 +27476,13 @@
       </p:sp>
       <p:sp>
         <p:nvSpPr>
-          <p:cNvPr id="39" name="Text 37"/>
-          <p:cNvSpPr/>
-          <p:nvPr/>
-        </p:nvSpPr>
-        <p:spPr>
-          <a:xfrm>
-            <a:off x="3033522" y="4169664"/>
+          <p:cNvPr id="42" name="Text 40"/>
+          <p:cNvSpPr/>
+          <p:nvPr/>
+        </p:nvSpPr>
+        <p:spPr>
+          <a:xfrm>
+            <a:off x="2831592" y="4169664"/>
             <a:ext cx="685800" cy="475488"/>
           </a:xfrm>
           <a:prstGeom prst="rect">
@@ -26763,7 +27507,7 @@
                 <a:ea typeface="Trebuchet MS" pitchFamily="34" charset="-122"/>
                 <a:cs typeface="Trebuchet MS" pitchFamily="34" charset="-120"/>
               </a:rPr>
-              <a:t>t</a:t>
+              <a:t>v</a:t>
             </a:r>
             <a:endParaRPr lang="en-US" sz="900" dirty="0"/>
           </a:p>
@@ -26771,13 +27515,13 @@
       </p:sp>
       <p:sp>
         <p:nvSpPr>
-          <p:cNvPr id="40" name="Shape 38"/>
-          <p:cNvSpPr/>
-          <p:nvPr/>
-        </p:nvSpPr>
-        <p:spPr>
-          <a:xfrm>
-            <a:off x="3942207" y="4169664"/>
+          <p:cNvPr id="43" name="Shape 41"/>
+          <p:cNvSpPr/>
+          <p:nvPr/>
+        </p:nvSpPr>
+        <p:spPr>
+          <a:xfrm>
+            <a:off x="3639312" y="4169664"/>
             <a:ext cx="685800" cy="475488"/>
           </a:xfrm>
           <a:prstGeom prst="rect">
@@ -26798,13 +27542,13 @@
       </p:sp>
       <p:sp>
         <p:nvSpPr>
-          <p:cNvPr id="41" name="Text 39"/>
-          <p:cNvSpPr/>
-          <p:nvPr/>
-        </p:nvSpPr>
-        <p:spPr>
-          <a:xfrm>
-            <a:off x="3942207" y="4169664"/>
+          <p:cNvPr id="44" name="Text 42"/>
+          <p:cNvSpPr/>
+          <p:nvPr/>
+        </p:nvSpPr>
+        <p:spPr>
+          <a:xfrm>
+            <a:off x="3639312" y="4169664"/>
             <a:ext cx="685800" cy="475488"/>
           </a:xfrm>
           <a:prstGeom prst="rect">
@@ -26829,7 +27573,7 @@
                 <a:ea typeface="Trebuchet MS" pitchFamily="34" charset="-122"/>
                 <a:cs typeface="Trebuchet MS" pitchFamily="34" charset="-120"/>
               </a:rPr>
-              <a:t>j</a:t>
+              <a:t>er</a:t>
             </a:r>
             <a:endParaRPr lang="en-US" sz="900" dirty="0"/>
           </a:p>
@@ -26837,13 +27581,13 @@
       </p:sp>
       <p:sp>
         <p:nvSpPr>
-          <p:cNvPr id="42" name="Shape 40"/>
-          <p:cNvSpPr/>
-          <p:nvPr/>
-        </p:nvSpPr>
-        <p:spPr>
-          <a:xfrm>
-            <a:off x="4850892" y="4169664"/>
+          <p:cNvPr id="45" name="Shape 43"/>
+          <p:cNvSpPr/>
+          <p:nvPr/>
+        </p:nvSpPr>
+        <p:spPr>
+          <a:xfrm>
+            <a:off x="4447032" y="4169664"/>
             <a:ext cx="685800" cy="475488"/>
           </a:xfrm>
           <a:prstGeom prst="rect">
@@ -26864,13 +27608,13 @@
       </p:sp>
       <p:sp>
         <p:nvSpPr>
-          <p:cNvPr id="43" name="Text 41"/>
-          <p:cNvSpPr/>
-          <p:nvPr/>
-        </p:nvSpPr>
-        <p:spPr>
-          <a:xfrm>
-            <a:off x="4850892" y="4169664"/>
+          <p:cNvPr id="46" name="Text 44"/>
+          <p:cNvSpPr/>
+          <p:nvPr/>
+        </p:nvSpPr>
+        <p:spPr>
+          <a:xfrm>
+            <a:off x="4447032" y="4169664"/>
             <a:ext cx="685800" cy="475488"/>
           </a:xfrm>
           <a:prstGeom prst="rect">
@@ -26895,7 +27639,7 @@
                 <a:ea typeface="Trebuchet MS" pitchFamily="34" charset="-122"/>
                 <a:cs typeface="Trebuchet MS" pitchFamily="34" charset="-120"/>
               </a:rPr>
-              <a:t>u</a:t>
+              <a:t>j</a:t>
             </a:r>
             <a:endParaRPr lang="en-US" sz="900" dirty="0"/>
           </a:p>
@@ -26903,13 +27647,13 @@
       </p:sp>
       <p:sp>
         <p:nvSpPr>
-          <p:cNvPr id="44" name="Shape 42"/>
-          <p:cNvSpPr/>
-          <p:nvPr/>
-        </p:nvSpPr>
-        <p:spPr>
-          <a:xfrm>
-            <a:off x="5759577" y="4169664"/>
+          <p:cNvPr id="47" name="Shape 45"/>
+          <p:cNvSpPr/>
+          <p:nvPr/>
+        </p:nvSpPr>
+        <p:spPr>
+          <a:xfrm>
+            <a:off x="5254752" y="4169664"/>
             <a:ext cx="685800" cy="475488"/>
           </a:xfrm>
           <a:prstGeom prst="rect">
@@ -26930,13 +27674,13 @@
       </p:sp>
       <p:sp>
         <p:nvSpPr>
-          <p:cNvPr id="45" name="Text 43"/>
-          <p:cNvSpPr/>
-          <p:nvPr/>
-        </p:nvSpPr>
-        <p:spPr>
-          <a:xfrm>
-            <a:off x="5759577" y="4169664"/>
+          <p:cNvPr id="48" name="Text 46"/>
+          <p:cNvSpPr/>
+          <p:nvPr/>
+        </p:nvSpPr>
+        <p:spPr>
+          <a:xfrm>
+            <a:off x="5254752" y="4169664"/>
             <a:ext cx="685800" cy="475488"/>
           </a:xfrm>
           <a:prstGeom prst="rect">
@@ -26961,7 +27705,7 @@
                 <a:ea typeface="Trebuchet MS" pitchFamily="34" charset="-122"/>
                 <a:cs typeface="Trebuchet MS" pitchFamily="34" charset="-120"/>
               </a:rPr>
-              <a:t>m</a:t>
+              <a:t>u</a:t>
             </a:r>
             <a:endParaRPr lang="en-US" sz="900" dirty="0"/>
           </a:p>
@@ -26969,13 +27713,13 @@
       </p:sp>
       <p:sp>
         <p:nvSpPr>
-          <p:cNvPr id="46" name="Shape 44"/>
-          <p:cNvSpPr/>
-          <p:nvPr/>
-        </p:nvSpPr>
-        <p:spPr>
-          <a:xfrm>
-            <a:off x="6668262" y="4169664"/>
+          <p:cNvPr id="49" name="Shape 47"/>
+          <p:cNvSpPr/>
+          <p:nvPr/>
+        </p:nvSpPr>
+        <p:spPr>
+          <a:xfrm>
+            <a:off x="6062472" y="4169664"/>
             <a:ext cx="685800" cy="475488"/>
           </a:xfrm>
           <a:prstGeom prst="rect">
@@ -26996,13 +27740,13 @@
       </p:sp>
       <p:sp>
         <p:nvSpPr>
-          <p:cNvPr id="47" name="Text 45"/>
-          <p:cNvSpPr/>
-          <p:nvPr/>
-        </p:nvSpPr>
-        <p:spPr>
-          <a:xfrm>
-            <a:off x="6668262" y="4169664"/>
+          <p:cNvPr id="50" name="Text 48"/>
+          <p:cNvSpPr/>
+          <p:nvPr/>
+        </p:nvSpPr>
+        <p:spPr>
+          <a:xfrm>
+            <a:off x="6062472" y="4169664"/>
             <a:ext cx="685800" cy="475488"/>
           </a:xfrm>
           <a:prstGeom prst="rect">
@@ -27027,7 +27771,7 @@
                 <a:ea typeface="Trebuchet MS" pitchFamily="34" charset="-122"/>
                 <a:cs typeface="Trebuchet MS" pitchFamily="34" charset="-120"/>
               </a:rPr>
-              <a:t>p</a:t>
+              <a:t>m</a:t>
             </a:r>
             <a:endParaRPr lang="en-US" sz="900" dirty="0"/>
           </a:p>
@@ -27035,13 +27779,13 @@
       </p:sp>
       <p:sp>
         <p:nvSpPr>
-          <p:cNvPr id="48" name="Shape 46"/>
-          <p:cNvSpPr/>
-          <p:nvPr/>
-        </p:nvSpPr>
-        <p:spPr>
-          <a:xfrm>
-            <a:off x="7576947" y="4169664"/>
+          <p:cNvPr id="51" name="Shape 49"/>
+          <p:cNvSpPr/>
+          <p:nvPr/>
+        </p:nvSpPr>
+        <p:spPr>
+          <a:xfrm>
+            <a:off x="6870192" y="4169664"/>
             <a:ext cx="685800" cy="475488"/>
           </a:xfrm>
           <a:prstGeom prst="rect">
@@ -27062,13 +27806,79 @@
       </p:sp>
       <p:sp>
         <p:nvSpPr>
-          <p:cNvPr id="49" name="Text 47"/>
-          <p:cNvSpPr/>
-          <p:nvPr/>
-        </p:nvSpPr>
-        <p:spPr>
-          <a:xfrm>
-            <a:off x="7576947" y="4169664"/>
+          <p:cNvPr id="52" name="Text 50"/>
+          <p:cNvSpPr/>
+          <p:nvPr/>
+        </p:nvSpPr>
+        <p:spPr>
+          <a:xfrm>
+            <a:off x="6870192" y="4169664"/>
+            <a:ext cx="685800" cy="475488"/>
+          </a:xfrm>
+          <a:prstGeom prst="rect">
+            <a:avLst/>
+          </a:prstGeom>
+          <a:noFill/>
+          <a:ln/>
+        </p:spPr>
+        <p:txBody>
+          <a:bodyPr wrap="square" lIns="0" tIns="0" rIns="0" bIns="0" rtlCol="0" anchor="ctr"/>
+          <a:lstStyle/>
+          <a:p>
+            <a:pPr algn="ctr" indent="0" marL="0">
+              <a:buNone/>
+            </a:pPr>
+            <a:r>
+              <a:rPr lang="en-US" sz="900" b="1" dirty="0">
+                <a:solidFill>
+                  <a:srgbClr val="9D174D"/>
+                </a:solidFill>
+                <a:latin typeface="Trebuchet MS" pitchFamily="34" charset="0"/>
+                <a:ea typeface="Trebuchet MS" pitchFamily="34" charset="-122"/>
+                <a:cs typeface="Trebuchet MS" pitchFamily="34" charset="-120"/>
+              </a:rPr>
+              <a:t>p</a:t>
+            </a:r>
+            <a:endParaRPr lang="en-US" sz="900" dirty="0"/>
+          </a:p>
+        </p:txBody>
+      </p:sp>
+      <p:sp>
+        <p:nvSpPr>
+          <p:cNvPr id="53" name="Shape 51"/>
+          <p:cNvSpPr/>
+          <p:nvPr/>
+        </p:nvSpPr>
+        <p:spPr>
+          <a:xfrm>
+            <a:off x="7677912" y="4169664"/>
+            <a:ext cx="685800" cy="475488"/>
+          </a:xfrm>
+          <a:prstGeom prst="rect">
+            <a:avLst>
+              <a:gd name="adj" fmla="val 7692"/>
+            </a:avLst>
+          </a:prstGeom>
+          <a:solidFill>
+            <a:srgbClr val="FFFFFF"/>
+          </a:solidFill>
+          <a:ln w="12700">
+            <a:solidFill>
+              <a:srgbClr val="DB2777"/>
+            </a:solidFill>
+            <a:prstDash val="solid"/>
+          </a:ln>
+        </p:spPr>
+      </p:sp>
+      <p:sp>
+        <p:nvSpPr>
+          <p:cNvPr id="54" name="Text 52"/>
+          <p:cNvSpPr/>
+          <p:nvPr/>
+        </p:nvSpPr>
+        <p:spPr>
+          <a:xfrm>
+            <a:off x="7677912" y="4169664"/>
             <a:ext cx="685800" cy="475488"/>
           </a:xfrm>
           <a:prstGeom prst="rect">
@@ -27524,7 +28334,7 @@
                 <a:ea typeface="Trebuchet MS" pitchFamily="34" charset="-122"/>
                 <a:cs typeface="Trebuchet MS" pitchFamily="34" charset="-120"/>
               </a:rPr>
-              <a:t>jumping</a:t>
+              <a:t>jumper</a:t>
             </a:r>
             <a:endParaRPr lang="en-US" sz="2800" dirty="0"/>
           </a:p>
@@ -28351,7 +29161,7 @@
                 <a:ea typeface="Trebuchet MS" pitchFamily="34" charset="-122"/>
                 <a:cs typeface="Trebuchet MS" pitchFamily="34" charset="-120"/>
               </a:rPr>
-              <a:t>jumping</a:t>
+              <a:t>jumper</a:t>
             </a:r>
             <a:endParaRPr lang="en-US" sz="2800" dirty="0"/>
           </a:p>
@@ -28602,7 +29412,7 @@
                 <a:ea typeface="Trebuchet MS" pitchFamily="34" charset="-122"/>
                 <a:cs typeface="Trebuchet MS" pitchFamily="34" charset="-120"/>
               </a:rPr>
-              <a:t>ing</a:t>
+              <a:t>er</a:t>
             </a:r>
             <a:endParaRPr lang="en-US" sz="1300" dirty="0"/>
           </a:p>
@@ -28641,7 +29451,7 @@
                 <a:ea typeface="Calibri" pitchFamily="34" charset="-122"/>
                 <a:cs typeface="Calibri" pitchFamily="34" charset="-120"/>
               </a:rPr>
-              <a:t>action happening now</a:t>
+              <a:t>a person or thing that does something</a:t>
             </a:r>
             <a:endParaRPr lang="en-US" sz="850" dirty="0"/>
           </a:p>
@@ -29336,7 +30146,7 @@
                 <a:ea typeface="Trebuchet MS" pitchFamily="34" charset="-122"/>
                 <a:cs typeface="Trebuchet MS" pitchFamily="34" charset="-120"/>
               </a:rPr>
-              <a:t>jumping</a:t>
+              <a:t>jumper</a:t>
             </a:r>
             <a:endParaRPr lang="en-US" sz="2800" dirty="0"/>
           </a:p>
@@ -29587,7 +30397,7 @@
                 <a:ea typeface="Trebuchet MS" pitchFamily="34" charset="-122"/>
                 <a:cs typeface="Trebuchet MS" pitchFamily="34" charset="-120"/>
               </a:rPr>
-              <a:t>ing</a:t>
+              <a:t>er</a:t>
             </a:r>
             <a:endParaRPr lang="en-US" sz="1300" dirty="0"/>
           </a:p>
@@ -29626,7 +30436,7 @@
                 <a:ea typeface="Calibri" pitchFamily="34" charset="-122"/>
                 <a:cs typeface="Calibri" pitchFamily="34" charset="-120"/>
               </a:rPr>
-              <a:t>action happening now</a:t>
+              <a:t>a person or thing that does something</a:t>
             </a:r>
             <a:endParaRPr lang="en-US" sz="850" dirty="0"/>
           </a:p>
@@ -29890,7 +30700,7 @@
                 <a:ea typeface="Trebuchet MS" pitchFamily="34" charset="-122"/>
                 <a:cs typeface="Trebuchet MS" pitchFamily="34" charset="-120"/>
               </a:rPr>
-              <a:t>ing</a:t>
+              <a:t>er</a:t>
             </a:r>
             <a:endParaRPr lang="en-US" sz="1400" dirty="0"/>
           </a:p>
@@ -30453,7 +31263,7 @@
                 <a:ea typeface="Trebuchet MS" pitchFamily="34" charset="-122"/>
                 <a:cs typeface="Trebuchet MS" pitchFamily="34" charset="-120"/>
               </a:rPr>
-              <a:t>jumping</a:t>
+              <a:t>jumper</a:t>
             </a:r>
             <a:endParaRPr lang="en-US" sz="2800" dirty="0"/>
           </a:p>
@@ -30704,7 +31514,7 @@
                 <a:ea typeface="Trebuchet MS" pitchFamily="34" charset="-122"/>
                 <a:cs typeface="Trebuchet MS" pitchFamily="34" charset="-120"/>
               </a:rPr>
-              <a:t>ing</a:t>
+              <a:t>er</a:t>
             </a:r>
             <a:endParaRPr lang="en-US" sz="1300" dirty="0"/>
           </a:p>
@@ -30743,7 +31553,7 @@
                 <a:ea typeface="Calibri" pitchFamily="34" charset="-122"/>
                 <a:cs typeface="Calibri" pitchFamily="34" charset="-120"/>
               </a:rPr>
-              <a:t>action happening now</a:t>
+              <a:t>a person or thing that does something</a:t>
             </a:r>
             <a:endParaRPr lang="en-US" sz="850" dirty="0"/>
           </a:p>
@@ -31007,7 +31817,7 @@
                 <a:ea typeface="Trebuchet MS" pitchFamily="34" charset="-122"/>
                 <a:cs typeface="Trebuchet MS" pitchFamily="34" charset="-120"/>
               </a:rPr>
-              <a:t>ing</a:t>
+              <a:t>er</a:t>
             </a:r>
             <a:endParaRPr lang="en-US" sz="1400" dirty="0"/>
           </a:p>
@@ -31430,7 +32240,7 @@
                 <a:ea typeface="Trebuchet MS" pitchFamily="34" charset="-122"/>
                 <a:cs typeface="Trebuchet MS" pitchFamily="34" charset="-120"/>
               </a:rPr>
-              <a:t>ing</a:t>
+              <a:t>er</a:t>
             </a:r>
             <a:endParaRPr lang="en-US" sz="900" dirty="0"/>
           </a:p>
@@ -34037,7 +34847,7 @@
                 <a:ea typeface="Trebuchet MS" pitchFamily="34" charset="-122"/>
                 <a:cs typeface="Trebuchet MS" pitchFamily="34" charset="-120"/>
               </a:rPr>
-              <a:t>jumped</a:t>
+              <a:t>jumping</a:t>
             </a:r>
             <a:endParaRPr lang="en-US" sz="1200" dirty="0"/>
           </a:p>
@@ -34103,7 +34913,7 @@
                 <a:ea typeface="Trebuchet MS" pitchFamily="34" charset="-122"/>
                 <a:cs typeface="Trebuchet MS" pitchFamily="34" charset="-120"/>
               </a:rPr>
-              <a:t>jumping</a:t>
+              <a:t>jumped</a:t>
             </a:r>
             <a:endParaRPr lang="en-US" sz="1200" dirty="0"/>
           </a:p>
@@ -35687,7 +36497,7 @@
                 <a:ea typeface="Calibri" pitchFamily="34" charset="-122"/>
                 <a:cs typeface="Calibri" pitchFamily="34" charset="-120"/>
               </a:rPr>
-              <a:t>1.  The word 'jumping' is formed by adding the suffix '-ing' to the root 'jump'.</a:t>
+              <a:t>1.  Adding '-er' to 'jump' can make a word that means a person who jumps.</a:t>
             </a:r>
             <a:endParaRPr lang="en-US" sz="1300" dirty="0"/>
           </a:p>
@@ -35826,7 +36636,7 @@
                 <a:ea typeface="Calibri" pitchFamily="34" charset="-122"/>
                 <a:cs typeface="Calibri" pitchFamily="34" charset="-120"/>
               </a:rPr>
-              <a:t>2.  The root 'jump' comes from ancient Greek.</a:t>
+              <a:t>2.  The word 'jumpy' means someone who is very calm and relaxed.</a:t>
             </a:r>
             <a:endParaRPr lang="en-US" sz="1300" dirty="0"/>
           </a:p>
@@ -35965,7 +36775,7 @@
                 <a:ea typeface="Calibri" pitchFamily="34" charset="-122"/>
                 <a:cs typeface="Calibri" pitchFamily="34" charset="-120"/>
               </a:rPr>
-              <a:t>3.  A 'jumper' can refer to a person who leaps or a warm piece of clothing.</a:t>
+              <a:t>3.  The word 'jumped' contains the root 'jump' with a suffix added.</a:t>
             </a:r>
             <a:endParaRPr lang="en-US" sz="1300" dirty="0"/>
           </a:p>
@@ -36104,7 +36914,7 @@
                 <a:ea typeface="Calibri" pitchFamily="34" charset="-122"/>
                 <a:cs typeface="Calibri" pitchFamily="34" charset="-120"/>
               </a:rPr>
-              <a:t>4.  Adding '-y' to 'jump' makes the word 'jumpy', meaning nervous or easily startled.</a:t>
+              <a:t>4.  The prefix 'out-' in 'outjump' means to do something more or better.</a:t>
             </a:r>
             <a:endParaRPr lang="en-US" sz="1300" dirty="0"/>
           </a:p>
@@ -36243,7 +37053,7 @@
                 <a:ea typeface="Calibri" pitchFamily="34" charset="-122"/>
                 <a:cs typeface="Calibri" pitchFamily="34" charset="-120"/>
               </a:rPr>
-              <a:t>5.  The prefix 'out-' in 'outjump' means 'under' or 'below'.</a:t>
+              <a:t>5.  The root 'jump' comes from ancient Greek.</a:t>
             </a:r>
             <a:endParaRPr lang="en-US" sz="1300" dirty="0"/>
           </a:p>
@@ -36777,7 +37587,7 @@
                 <a:ea typeface="Calibri" pitchFamily="34" charset="-122"/>
                 <a:cs typeface="Calibri" pitchFamily="34" charset="-120"/>
               </a:rPr>
-              <a:t>Origin: Latin: jompare</a:t>
+              <a:t>Origin: Latin: iumpare</a:t>
             </a:r>
             <a:endParaRPr lang="en-US" sz="1100" dirty="0"/>
           </a:p>
@@ -36882,7 +37692,7 @@
                 <a:ea typeface="Trebuchet MS" pitchFamily="34" charset="-122"/>
                 <a:cs typeface="Trebuchet MS" pitchFamily="34" charset="-120"/>
               </a:rPr>
-              <a:t>jumped</a:t>
+              <a:t>jumping</a:t>
             </a:r>
             <a:endParaRPr lang="en-US" sz="1300" dirty="0"/>
           </a:p>
@@ -36948,7 +37758,7 @@
                 <a:ea typeface="Trebuchet MS" pitchFamily="34" charset="-122"/>
                 <a:cs typeface="Trebuchet MS" pitchFamily="34" charset="-120"/>
               </a:rPr>
-              <a:t>jumping</a:t>
+              <a:t>jumped</a:t>
             </a:r>
             <a:endParaRPr lang="en-US" sz="1300" dirty="0"/>
           </a:p>
@@ -39052,7 +39862,7 @@
                 <a:ea typeface="Trebuchet MS" pitchFamily="34" charset="-122"/>
                 <a:cs typeface="Trebuchet MS" pitchFamily="34" charset="-120"/>
               </a:rPr>
-              <a:t>jumped</a:t>
+              <a:t>jumping</a:t>
             </a:r>
             <a:endParaRPr lang="en-US" sz="1400" dirty="0"/>
           </a:p>
@@ -39456,7 +40266,7 @@
                 <a:ea typeface="Trebuchet MS" pitchFamily="34" charset="-122"/>
                 <a:cs typeface="Trebuchet MS" pitchFamily="34" charset="-120"/>
               </a:rPr>
-              <a:t>jumped</a:t>
+              <a:t>jumping</a:t>
             </a:r>
             <a:endParaRPr lang="en-US" sz="1200" dirty="0"/>
           </a:p>
@@ -39522,7 +40332,7 @@
                 <a:ea typeface="Calibri" pitchFamily="34" charset="-122"/>
                 <a:cs typeface="Calibri" pitchFamily="34" charset="-120"/>
               </a:rPr>
-              <a:t>A person or animal that leaps, or a warm woolly top you wear.</a:t>
+              <a:t>A person or animal that jumps, or a warm top you pull over your head.</a:t>
             </a:r>
             <a:endParaRPr lang="en-US" sz="1200" dirty="0"/>
           </a:p>
@@ -39595,7 +40405,7 @@
                 <a:ea typeface="Trebuchet MS" pitchFamily="34" charset="-122"/>
                 <a:cs typeface="Trebuchet MS" pitchFamily="34" charset="-120"/>
               </a:rPr>
-              <a:t>jumping</a:t>
+              <a:t>jumped</a:t>
             </a:r>
             <a:endParaRPr lang="en-US" sz="1200" dirty="0"/>
           </a:p>
@@ -39661,7 +40471,7 @@
                 <a:ea typeface="Calibri" pitchFamily="34" charset="-122"/>
                 <a:cs typeface="Calibri" pitchFamily="34" charset="-120"/>
               </a:rPr>
-              <a:t>To jump too far, going past the place you were aiming for.</a:t>
+              <a:t>To jump too far and go past the target or landing spot.</a:t>
             </a:r>
             <a:endParaRPr lang="en-US" sz="1200" dirty="0"/>
           </a:p>
@@ -39800,7 +40610,7 @@
                 <a:ea typeface="Calibri" pitchFamily="34" charset="-122"/>
                 <a:cs typeface="Calibri" pitchFamily="34" charset="-120"/>
               </a:rPr>
-              <a:t>When someone already leapt up into the air in the past.</a:t>
+              <a:t>Moving through the air by pushing off the ground with your legs.</a:t>
             </a:r>
             <a:endParaRPr lang="en-US" sz="1200" dirty="0"/>
           </a:p>
@@ -39939,7 +40749,7 @@
                 <a:ea typeface="Calibri" pitchFamily="34" charset="-122"/>
                 <a:cs typeface="Calibri" pitchFamily="34" charset="-120"/>
               </a:rPr>
-              <a:t>To suddenly spring upward with great energy.</a:t>
+              <a:t>To leap suddenly upward with energy.</a:t>
             </a:r>
             <a:endParaRPr lang="en-US" sz="1200" dirty="0"/>
           </a:p>
@@ -40217,7 +41027,7 @@
                 <a:ea typeface="Calibri" pitchFamily="34" charset="-122"/>
                 <a:cs typeface="Calibri" pitchFamily="34" charset="-120"/>
               </a:rPr>
-              <a:t>Feeling nervous and easily startled, like you might leap at any sound.</a:t>
+              <a:t>Feeling nervous or easily startled, like you might jump at any moment.</a:t>
             </a:r>
             <a:endParaRPr lang="en-US" sz="1200" dirty="0"/>
           </a:p>
@@ -40356,7 +41166,7 @@
                 <a:ea typeface="Calibri" pitchFamily="34" charset="-122"/>
                 <a:cs typeface="Calibri" pitchFamily="34" charset="-120"/>
               </a:rPr>
-              <a:t>The action of leaping into the air right now.</a:t>
+              <a:t>Did a jump in the past; leapt off the ground.</a:t>
             </a:r>
             <a:endParaRPr lang="en-US" sz="1200" dirty="0"/>
           </a:p>
@@ -40851,7 +41661,7 @@
                 <a:ea typeface="Calibri" pitchFamily="34" charset="-122"/>
                 <a:cs typeface="Calibri" pitchFamily="34" charset="-120"/>
               </a:rPr>
-              <a:t>The athlete was jumping over the hurdles so gracefully that the crowd began to cheer.</a:t>
+              <a:t>The athlete was jumping over the hurdles with incredible speed and grace.</a:t>
             </a:r>
             <a:endParaRPr lang="en-US" sz="1500" dirty="0"/>
           </a:p>
@@ -41015,7 +41825,7 @@
                 <a:ea typeface="Calibri" pitchFamily="34" charset="-122"/>
                 <a:cs typeface="Calibri" pitchFamily="34" charset="-120"/>
               </a:rPr>
-              <a:t>My little brother is quite jumpy at night because he is scared of loud noises.</a:t>
+              <a:t>After the starting pistol fired, she outjumped every other competitor on the track.</a:t>
             </a:r>
             <a:endParaRPr lang="en-US" sz="1500" dirty="0"/>
           </a:p>
@@ -41179,7 +41989,7 @@
                 <a:ea typeface="Calibri" pitchFamily="34" charset="-122"/>
                 <a:cs typeface="Calibri" pitchFamily="34" charset="-120"/>
               </a:rPr>
-              <a:t>She outjumped every other competitor in the long jump event at the school carnival.</a:t>
+              <a:t>The excited puppy was so jumpy that it leapt up every time someone walked through the door.</a:t>
             </a:r>
             <a:endParaRPr lang="en-US" sz="1500" dirty="0"/>
           </a:p>

--- a/output/wordlabs-jump-3day.pptx
+++ b/output/wordlabs-jump-3day.pptx
@@ -15383,7 +15383,7 @@
         </p:nvSpPr>
         <p:spPr>
           <a:xfrm>
-            <a:off x="2124837" y="4169664"/>
+            <a:off x="2023872" y="4169664"/>
             <a:ext cx="685800" cy="475488"/>
           </a:xfrm>
           <a:prstGeom prst="rect">
@@ -15410,7 +15410,7 @@
         </p:nvSpPr>
         <p:spPr>
           <a:xfrm>
-            <a:off x="2124837" y="4169664"/>
+            <a:off x="2023872" y="4169664"/>
             <a:ext cx="685800" cy="475488"/>
           </a:xfrm>
           <a:prstGeom prst="rect">
@@ -15449,7 +15449,7 @@
         </p:nvSpPr>
         <p:spPr>
           <a:xfrm>
-            <a:off x="3033522" y="4169664"/>
+            <a:off x="2831592" y="4169664"/>
             <a:ext cx="685800" cy="475488"/>
           </a:xfrm>
           <a:prstGeom prst="rect">
@@ -15476,7 +15476,7 @@
         </p:nvSpPr>
         <p:spPr>
           <a:xfrm>
-            <a:off x="3033522" y="4169664"/>
+            <a:off x="2831592" y="4169664"/>
             <a:ext cx="685800" cy="475488"/>
           </a:xfrm>
           <a:prstGeom prst="rect">
@@ -15515,7 +15515,7 @@
         </p:nvSpPr>
         <p:spPr>
           <a:xfrm>
-            <a:off x="3942207" y="4169664"/>
+            <a:off x="3639312" y="4169664"/>
             <a:ext cx="685800" cy="475488"/>
           </a:xfrm>
           <a:prstGeom prst="rect">
@@ -15542,7 +15542,7 @@
         </p:nvSpPr>
         <p:spPr>
           <a:xfrm>
-            <a:off x="3942207" y="4169664"/>
+            <a:off x="3639312" y="4169664"/>
             <a:ext cx="685800" cy="475488"/>
           </a:xfrm>
           <a:prstGeom prst="rect">
@@ -15581,7 +15581,7 @@
         </p:nvSpPr>
         <p:spPr>
           <a:xfrm>
-            <a:off x="4850892" y="4169664"/>
+            <a:off x="4447032" y="4169664"/>
             <a:ext cx="685800" cy="475488"/>
           </a:xfrm>
           <a:prstGeom prst="rect">
@@ -15608,7 +15608,7 @@
         </p:nvSpPr>
         <p:spPr>
           <a:xfrm>
-            <a:off x="4850892" y="4169664"/>
+            <a:off x="4447032" y="4169664"/>
             <a:ext cx="685800" cy="475488"/>
           </a:xfrm>
           <a:prstGeom prst="rect">
@@ -15647,7 +15647,7 @@
         </p:nvSpPr>
         <p:spPr>
           <a:xfrm>
-            <a:off x="5759577" y="4169664"/>
+            <a:off x="5254752" y="4169664"/>
             <a:ext cx="685800" cy="475488"/>
           </a:xfrm>
           <a:prstGeom prst="rect">
@@ -15674,7 +15674,7 @@
         </p:nvSpPr>
         <p:spPr>
           <a:xfrm>
-            <a:off x="5759577" y="4169664"/>
+            <a:off x="5254752" y="4169664"/>
             <a:ext cx="685800" cy="475488"/>
           </a:xfrm>
           <a:prstGeom prst="rect">
@@ -15713,7 +15713,7 @@
         </p:nvSpPr>
         <p:spPr>
           <a:xfrm>
-            <a:off x="6668262" y="4169664"/>
+            <a:off x="6062472" y="4169664"/>
             <a:ext cx="685800" cy="475488"/>
           </a:xfrm>
           <a:prstGeom prst="rect">
@@ -15740,7 +15740,7 @@
         </p:nvSpPr>
         <p:spPr>
           <a:xfrm>
-            <a:off x="6668262" y="4169664"/>
+            <a:off x="6062472" y="4169664"/>
             <a:ext cx="685800" cy="475488"/>
           </a:xfrm>
           <a:prstGeom prst="rect">
@@ -15779,7 +15779,7 @@
         </p:nvSpPr>
         <p:spPr>
           <a:xfrm>
-            <a:off x="7576947" y="4169664"/>
+            <a:off x="6870192" y="4169664"/>
             <a:ext cx="685800" cy="475488"/>
           </a:xfrm>
           <a:prstGeom prst="rect">
@@ -15806,7 +15806,7 @@
         </p:nvSpPr>
         <p:spPr>
           <a:xfrm>
-            <a:off x="7576947" y="4169664"/>
+            <a:off x="6870192" y="4169664"/>
             <a:ext cx="685800" cy="475488"/>
           </a:xfrm>
           <a:prstGeom prst="rect">
@@ -15831,7 +15831,73 @@
                 <a:ea typeface="Trebuchet MS" pitchFamily="34" charset="-122"/>
                 <a:cs typeface="Trebuchet MS" pitchFamily="34" charset="-120"/>
               </a:rPr>
-              <a:t>t</a:t>
+              <a:t>e</a:t>
+            </a:r>
+            <a:endParaRPr lang="en-US" sz="900" dirty="0"/>
+          </a:p>
+        </p:txBody>
+      </p:sp>
+      <p:sp>
+        <p:nvSpPr>
+          <p:cNvPr id="50" name="Shape 48"/>
+          <p:cNvSpPr/>
+          <p:nvPr/>
+        </p:nvSpPr>
+        <p:spPr>
+          <a:xfrm>
+            <a:off x="7677912" y="4169664"/>
+            <a:ext cx="685800" cy="475488"/>
+          </a:xfrm>
+          <a:prstGeom prst="rect">
+            <a:avLst>
+              <a:gd name="adj" fmla="val 7692"/>
+            </a:avLst>
+          </a:prstGeom>
+          <a:solidFill>
+            <a:srgbClr val="FFFFFF"/>
+          </a:solidFill>
+          <a:ln w="12700">
+            <a:solidFill>
+              <a:srgbClr val="DB2777"/>
+            </a:solidFill>
+            <a:prstDash val="solid"/>
+          </a:ln>
+        </p:spPr>
+      </p:sp>
+      <p:sp>
+        <p:nvSpPr>
+          <p:cNvPr id="51" name="Text 49"/>
+          <p:cNvSpPr/>
+          <p:nvPr/>
+        </p:nvSpPr>
+        <p:spPr>
+          <a:xfrm>
+            <a:off x="7677912" y="4169664"/>
+            <a:ext cx="685800" cy="475488"/>
+          </a:xfrm>
+          <a:prstGeom prst="rect">
+            <a:avLst/>
+          </a:prstGeom>
+          <a:noFill/>
+          <a:ln/>
+        </p:spPr>
+        <p:txBody>
+          <a:bodyPr wrap="square" lIns="0" tIns="0" rIns="0" bIns="0" rtlCol="0" anchor="ctr"/>
+          <a:lstStyle/>
+          <a:p>
+            <a:pPr algn="ctr" indent="0" marL="0">
+              <a:buNone/>
+            </a:pPr>
+            <a:r>
+              <a:rPr lang="en-US" sz="900" b="1" dirty="0">
+                <a:solidFill>
+                  <a:srgbClr val="9D174D"/>
+                </a:solidFill>
+                <a:latin typeface="Trebuchet MS" pitchFamily="34" charset="0"/>
+                <a:ea typeface="Trebuchet MS" pitchFamily="34" charset="-122"/>
+                <a:cs typeface="Trebuchet MS" pitchFamily="34" charset="-120"/>
+              </a:rPr>
+              <a:t>d</a:t>
             </a:r>
             <a:endParaRPr lang="en-US" sz="900" dirty="0"/>
           </a:p>
@@ -27389,8 +27455,8 @@
         </p:nvSpPr>
         <p:spPr>
           <a:xfrm>
-            <a:off x="2023872" y="4169664"/>
-            <a:ext cx="685800" cy="475488"/>
+            <a:off x="1951330" y="4169664"/>
+            <a:ext cx="676656" cy="475488"/>
           </a:xfrm>
           <a:prstGeom prst="rect">
             <a:avLst>
@@ -27416,8 +27482,8 @@
         </p:nvSpPr>
         <p:spPr>
           <a:xfrm>
-            <a:off x="2023872" y="4169664"/>
-            <a:ext cx="685800" cy="475488"/>
+            <a:off x="1951330" y="4169664"/>
+            <a:ext cx="676656" cy="475488"/>
           </a:xfrm>
           <a:prstGeom prst="rect">
             <a:avLst/>
@@ -27455,8 +27521,8 @@
         </p:nvSpPr>
         <p:spPr>
           <a:xfrm>
-            <a:off x="2831592" y="4169664"/>
-            <a:ext cx="685800" cy="475488"/>
+            <a:off x="2677363" y="4169664"/>
+            <a:ext cx="676656" cy="475488"/>
           </a:xfrm>
           <a:prstGeom prst="rect">
             <a:avLst>
@@ -27482,8 +27548,8 @@
         </p:nvSpPr>
         <p:spPr>
           <a:xfrm>
-            <a:off x="2831592" y="4169664"/>
-            <a:ext cx="685800" cy="475488"/>
+            <a:off x="2677363" y="4169664"/>
+            <a:ext cx="676656" cy="475488"/>
           </a:xfrm>
           <a:prstGeom prst="rect">
             <a:avLst/>
@@ -27521,8 +27587,8 @@
         </p:nvSpPr>
         <p:spPr>
           <a:xfrm>
-            <a:off x="3639312" y="4169664"/>
-            <a:ext cx="685800" cy="475488"/>
+            <a:off x="3403397" y="4169664"/>
+            <a:ext cx="676656" cy="475488"/>
           </a:xfrm>
           <a:prstGeom prst="rect">
             <a:avLst>
@@ -27548,8 +27614,8 @@
         </p:nvSpPr>
         <p:spPr>
           <a:xfrm>
-            <a:off x="3639312" y="4169664"/>
-            <a:ext cx="685800" cy="475488"/>
+            <a:off x="3403397" y="4169664"/>
+            <a:ext cx="676656" cy="475488"/>
           </a:xfrm>
           <a:prstGeom prst="rect">
             <a:avLst/>
@@ -27587,8 +27653,8 @@
         </p:nvSpPr>
         <p:spPr>
           <a:xfrm>
-            <a:off x="4447032" y="4169664"/>
-            <a:ext cx="685800" cy="475488"/>
+            <a:off x="4129430" y="4169664"/>
+            <a:ext cx="676656" cy="475488"/>
           </a:xfrm>
           <a:prstGeom prst="rect">
             <a:avLst>
@@ -27614,8 +27680,8 @@
         </p:nvSpPr>
         <p:spPr>
           <a:xfrm>
-            <a:off x="4447032" y="4169664"/>
-            <a:ext cx="685800" cy="475488"/>
+            <a:off x="4129430" y="4169664"/>
+            <a:ext cx="676656" cy="475488"/>
           </a:xfrm>
           <a:prstGeom prst="rect">
             <a:avLst/>
@@ -27653,8 +27719,8 @@
         </p:nvSpPr>
         <p:spPr>
           <a:xfrm>
-            <a:off x="5254752" y="4169664"/>
-            <a:ext cx="685800" cy="475488"/>
+            <a:off x="4855464" y="4169664"/>
+            <a:ext cx="676656" cy="475488"/>
           </a:xfrm>
           <a:prstGeom prst="rect">
             <a:avLst>
@@ -27680,8 +27746,8 @@
         </p:nvSpPr>
         <p:spPr>
           <a:xfrm>
-            <a:off x="5254752" y="4169664"/>
-            <a:ext cx="685800" cy="475488"/>
+            <a:off x="4855464" y="4169664"/>
+            <a:ext cx="676656" cy="475488"/>
           </a:xfrm>
           <a:prstGeom prst="rect">
             <a:avLst/>
@@ -27719,8 +27785,8 @@
         </p:nvSpPr>
         <p:spPr>
           <a:xfrm>
-            <a:off x="6062472" y="4169664"/>
-            <a:ext cx="685800" cy="475488"/>
+            <a:off x="5581498" y="4169664"/>
+            <a:ext cx="676656" cy="475488"/>
           </a:xfrm>
           <a:prstGeom prst="rect">
             <a:avLst>
@@ -27746,8 +27812,8 @@
         </p:nvSpPr>
         <p:spPr>
           <a:xfrm>
-            <a:off x="6062472" y="4169664"/>
-            <a:ext cx="685800" cy="475488"/>
+            <a:off x="5581498" y="4169664"/>
+            <a:ext cx="676656" cy="475488"/>
           </a:xfrm>
           <a:prstGeom prst="rect">
             <a:avLst/>
@@ -27785,8 +27851,8 @@
         </p:nvSpPr>
         <p:spPr>
           <a:xfrm>
-            <a:off x="6870192" y="4169664"/>
-            <a:ext cx="685800" cy="475488"/>
+            <a:off x="6307531" y="4169664"/>
+            <a:ext cx="676656" cy="475488"/>
           </a:xfrm>
           <a:prstGeom prst="rect">
             <a:avLst>
@@ -27812,8 +27878,8 @@
         </p:nvSpPr>
         <p:spPr>
           <a:xfrm>
-            <a:off x="6870192" y="4169664"/>
-            <a:ext cx="685800" cy="475488"/>
+            <a:off x="6307531" y="4169664"/>
+            <a:ext cx="676656" cy="475488"/>
           </a:xfrm>
           <a:prstGeom prst="rect">
             <a:avLst/>
@@ -27851,8 +27917,8 @@
         </p:nvSpPr>
         <p:spPr>
           <a:xfrm>
-            <a:off x="7677912" y="4169664"/>
-            <a:ext cx="685800" cy="475488"/>
+            <a:off x="7033565" y="4169664"/>
+            <a:ext cx="676656" cy="475488"/>
           </a:xfrm>
           <a:prstGeom prst="rect">
             <a:avLst>
@@ -27878,8 +27944,8 @@
         </p:nvSpPr>
         <p:spPr>
           <a:xfrm>
-            <a:off x="7677912" y="4169664"/>
-            <a:ext cx="685800" cy="475488"/>
+            <a:off x="7033565" y="4169664"/>
+            <a:ext cx="676656" cy="475488"/>
           </a:xfrm>
           <a:prstGeom prst="rect">
             <a:avLst/>
@@ -27903,7 +27969,73 @@
                 <a:ea typeface="Trebuchet MS" pitchFamily="34" charset="-122"/>
                 <a:cs typeface="Trebuchet MS" pitchFamily="34" charset="-120"/>
               </a:rPr>
-              <a:t>t</a:t>
+              <a:t>e</a:t>
+            </a:r>
+            <a:endParaRPr lang="en-US" sz="900" dirty="0"/>
+          </a:p>
+        </p:txBody>
+      </p:sp>
+      <p:sp>
+        <p:nvSpPr>
+          <p:cNvPr id="55" name="Shape 53"/>
+          <p:cNvSpPr/>
+          <p:nvPr/>
+        </p:nvSpPr>
+        <p:spPr>
+          <a:xfrm>
+            <a:off x="7759598" y="4169664"/>
+            <a:ext cx="676656" cy="475488"/>
+          </a:xfrm>
+          <a:prstGeom prst="rect">
+            <a:avLst>
+              <a:gd name="adj" fmla="val 7692"/>
+            </a:avLst>
+          </a:prstGeom>
+          <a:solidFill>
+            <a:srgbClr val="FFFFFF"/>
+          </a:solidFill>
+          <a:ln w="12700">
+            <a:solidFill>
+              <a:srgbClr val="DB2777"/>
+            </a:solidFill>
+            <a:prstDash val="solid"/>
+          </a:ln>
+        </p:spPr>
+      </p:sp>
+      <p:sp>
+        <p:nvSpPr>
+          <p:cNvPr id="56" name="Text 54"/>
+          <p:cNvSpPr/>
+          <p:nvPr/>
+        </p:nvSpPr>
+        <p:spPr>
+          <a:xfrm>
+            <a:off x="7759598" y="4169664"/>
+            <a:ext cx="676656" cy="475488"/>
+          </a:xfrm>
+          <a:prstGeom prst="rect">
+            <a:avLst/>
+          </a:prstGeom>
+          <a:noFill/>
+          <a:ln/>
+        </p:spPr>
+        <p:txBody>
+          <a:bodyPr wrap="square" lIns="0" tIns="0" rIns="0" bIns="0" rtlCol="0" anchor="ctr"/>
+          <a:lstStyle/>
+          <a:p>
+            <a:pPr algn="ctr" indent="0" marL="0">
+              <a:buNone/>
+            </a:pPr>
+            <a:r>
+              <a:rPr lang="en-US" sz="900" b="1" dirty="0">
+                <a:solidFill>
+                  <a:srgbClr val="9D174D"/>
+                </a:solidFill>
+                <a:latin typeface="Trebuchet MS" pitchFamily="34" charset="0"/>
+                <a:ea typeface="Trebuchet MS" pitchFamily="34" charset="-122"/>
+                <a:cs typeface="Trebuchet MS" pitchFamily="34" charset="-120"/>
+              </a:rPr>
+              <a:t>d</a:t>
             </a:r>
             <a:endParaRPr lang="en-US" sz="900" dirty="0"/>
           </a:p>
@@ -36497,7 +36629,7 @@
                 <a:ea typeface="Calibri" pitchFamily="34" charset="-122"/>
                 <a:cs typeface="Calibri" pitchFamily="34" charset="-120"/>
               </a:rPr>
-              <a:t>1.  Adding '-er' to 'jump' can make a word that means a person who jumps.</a:t>
+              <a:t>1.  The prefix 'out-' in 'outjump' means to do something more or better.</a:t>
             </a:r>
             <a:endParaRPr lang="en-US" sz="1300" dirty="0"/>
           </a:p>
@@ -36775,7 +36907,7 @@
                 <a:ea typeface="Calibri" pitchFamily="34" charset="-122"/>
                 <a:cs typeface="Calibri" pitchFamily="34" charset="-120"/>
               </a:rPr>
-              <a:t>3.  The word 'jumped' contains the root 'jump' with a suffix added.</a:t>
+              <a:t>3.  Adding '-er' to 'jump' can make a word that means a person who jumps.</a:t>
             </a:r>
             <a:endParaRPr lang="en-US" sz="1300" dirty="0"/>
           </a:p>
@@ -36914,7 +37046,7 @@
                 <a:ea typeface="Calibri" pitchFamily="34" charset="-122"/>
                 <a:cs typeface="Calibri" pitchFamily="34" charset="-120"/>
               </a:rPr>
-              <a:t>4.  The prefix 'out-' in 'outjump' means to do something more or better.</a:t>
+              <a:t>4.  The word 'jumped' contains the root 'jump' with a suffix added.</a:t>
             </a:r>
             <a:endParaRPr lang="en-US" sz="1300" dirty="0"/>
           </a:p>
